--- a/examples/architecture-diagram/figure.pptx
+++ b/examples/architecture-diagram/figure.pptx
@@ -3560,11 +3560,11 @@
         <p:spPr>
           <a:xfrm>
             <a:off x="325120" y="731520"/>
-            <a:ext cx="3779520" cy="894080"/>
+            <a:ext cx="4307840" cy="1137920"/>
           </a:xfrm>
           <a:prstGeom prst="roundRect">
             <a:avLst>
-              <a:gd name="adj" fmla="val 4545"/>
+              <a:gd name="adj" fmla="val 3571"/>
             </a:avLst>
           </a:prstGeom>
           <a:noFill/>
@@ -3590,12 +3590,12 @@
           </a:fontRef>
         </p:style>
         <p:txBody>
-          <a:bodyPr rtlCol="0" anchor="t" wrap="none" lIns="0" rIns="0" tIns="91440" bIns="0"/>
+          <a:bodyPr rtlCol="0" anchor="t" wrap="none" lIns="0" rIns="0" tIns="83058" bIns="0"/>
           <a:lstStyle/>
           <a:p>
             <a:pPr algn="l" marL="81280">
               <a:lnSpc>
-                <a:spcPts val="768"/>
+                <a:spcPts val="873"/>
               </a:lnSpc>
               <a:spcBef>
                 <a:spcPts val="0"/>
@@ -3605,7 +3605,7 @@
               </a:spcAft>
             </a:pPr>
             <a:r>
-              <a:rPr sz="800" b="1">
+              <a:rPr sz="910" b="1">
                 <a:solidFill>
                   <a:srgbClr val="64748B"/>
                 </a:solidFill>
@@ -3624,12 +3624,12 @@
         </p:nvSpPr>
         <p:spPr>
           <a:xfrm>
-            <a:off x="447040" y="1056640"/>
-            <a:ext cx="812800" cy="365760"/>
+            <a:off x="487680" y="1137920"/>
+            <a:ext cx="894080" cy="487680"/>
           </a:xfrm>
           <a:prstGeom prst="roundRect">
             <a:avLst>
-              <a:gd name="adj" fmla="val 11111"/>
+              <a:gd name="adj" fmla="val 8333"/>
             </a:avLst>
           </a:prstGeom>
           <a:solidFill>
@@ -3656,12 +3656,12 @@
           </a:fontRef>
         </p:style>
         <p:txBody>
-          <a:bodyPr rtlCol="0" anchor="t" wrap="none" lIns="0" rIns="0" tIns="104140" bIns="0"/>
+          <a:bodyPr rtlCol="0" anchor="t" wrap="none" lIns="0" rIns="0" tIns="115951" bIns="0"/>
           <a:lstStyle/>
           <a:p>
-            <a:pPr algn="l" marL="81280">
+            <a:pPr algn="l" marL="92456">
               <a:lnSpc>
-                <a:spcPts val="864"/>
+                <a:spcPts val="984"/>
               </a:lnSpc>
               <a:spcBef>
                 <a:spcPts val="0"/>
@@ -3671,7 +3671,7 @@
               </a:spcAft>
             </a:pPr>
             <a:r>
-              <a:rPr sz="900" b="1">
+              <a:rPr sz="1025" b="1">
                 <a:solidFill>
                   <a:srgbClr val="374151"/>
                 </a:solidFill>
@@ -3681,19 +3681,19 @@
             </a:r>
           </a:p>
           <a:p>
-            <a:pPr algn="l" marL="81280">
+            <a:pPr algn="l" marL="92456">
               <a:lnSpc>
-                <a:spcPts val="768"/>
+                <a:spcPts val="873"/>
               </a:lnSpc>
               <a:spcBef>
-                <a:spcPts val="176"/>
+                <a:spcPts val="376"/>
               </a:spcBef>
               <a:spcAft>
                 <a:spcPts val="0"/>
               </a:spcAft>
             </a:pPr>
             <a:r>
-              <a:rPr sz="800">
+              <a:rPr sz="910">
                 <a:solidFill>
                   <a:srgbClr val="64748B"/>
                 </a:solidFill>
@@ -3712,8 +3712,381 @@
         </p:nvSpPr>
         <p:spPr>
           <a:xfrm>
-            <a:off x="1381760" y="1016000"/>
-            <a:ext cx="1341120" cy="487680"/>
+            <a:off x="1544320" y="1056640"/>
+            <a:ext cx="1463040" cy="650240"/>
+          </a:xfrm>
+          <a:prstGeom prst="roundRect">
+            <a:avLst>
+              <a:gd name="adj" fmla="val 6250"/>
+            </a:avLst>
+          </a:prstGeom>
+          <a:solidFill>
+            <a:srgbClr val="F8FAFC"/>
+          </a:solidFill>
+          <a:ln w="19050">
+            <a:solidFill>
+              <a:srgbClr val="475569"/>
+            </a:solidFill>
+          </a:ln>
+        </p:spPr>
+        <p:style>
+          <a:lnRef idx="1">
+            <a:schemeClr val="accent1"/>
+          </a:lnRef>
+          <a:fillRef idx="3">
+            <a:schemeClr val="accent1"/>
+          </a:fillRef>
+          <a:effectRef idx="2">
+            <a:schemeClr val="accent1"/>
+          </a:effectRef>
+          <a:fontRef idx="minor">
+            <a:schemeClr val="lt1"/>
+          </a:fontRef>
+        </p:style>
+        <p:txBody>
+          <a:bodyPr rtlCol="0" anchor="t" wrap="none" lIns="0" rIns="0" tIns="115951" bIns="0"/>
+          <a:lstStyle/>
+          <a:p>
+            <a:pPr algn="l" marL="92456">
+              <a:lnSpc>
+                <a:spcPts val="984"/>
+              </a:lnSpc>
+              <a:spcBef>
+                <a:spcPts val="0"/>
+              </a:spcBef>
+              <a:spcAft>
+                <a:spcPts val="0"/>
+              </a:spcAft>
+            </a:pPr>
+            <a:r>
+              <a:rPr sz="1025" b="1">
+                <a:solidFill>
+                  <a:srgbClr val="374151"/>
+                </a:solidFill>
+                <a:latin typeface="Arial"/>
+              </a:rPr>
+              <a:t>Embedding</a:t>
+            </a:r>
+          </a:p>
+          <a:p>
+            <a:pPr algn="l" marL="92456">
+              <a:lnSpc>
+                <a:spcPts val="873"/>
+              </a:lnSpc>
+              <a:spcBef>
+                <a:spcPts val="296"/>
+              </a:spcBef>
+              <a:spcAft>
+                <a:spcPts val="0"/>
+              </a:spcAft>
+            </a:pPr>
+            <a:r>
+              <a:rPr sz="910">
+                <a:solidFill>
+                  <a:srgbClr val="64748B"/>
+                </a:solidFill>
+                <a:latin typeface="Arial"/>
+              </a:rPr>
+              <a:t>vocab 32k, weight-tied</a:t>
+            </a:r>
+          </a:p>
+          <a:p>
+            <a:pPr algn="l" marL="92456">
+              <a:lnSpc>
+                <a:spcPts val="873"/>
+              </a:lnSpc>
+              <a:spcBef>
+                <a:spcPts val="486"/>
+              </a:spcBef>
+              <a:spcAft>
+                <a:spcPts val="0"/>
+              </a:spcAft>
+            </a:pPr>
+            <a:r>
+              <a:rPr sz="910">
+                <a:solidFill>
+                  <a:srgbClr val="64748B"/>
+                </a:solidFill>
+                <a:latin typeface="Arial"/>
+              </a:rPr>
+              <a:t>(B, L, d)</a:t>
+            </a:r>
+          </a:p>
+        </p:txBody>
+      </p:sp>
+      <p:sp>
+        <p:nvSpPr>
+          <p:cNvPr id="6" name="Rounded Rectangle 5"/>
+          <p:cNvSpPr/>
+          <p:nvPr/>
+        </p:nvSpPr>
+        <p:spPr>
+          <a:xfrm>
+            <a:off x="3169920" y="1056640"/>
+            <a:ext cx="1300480" cy="650240"/>
+          </a:xfrm>
+          <a:prstGeom prst="roundRect">
+            <a:avLst>
+              <a:gd name="adj" fmla="val 6250"/>
+            </a:avLst>
+          </a:prstGeom>
+          <a:solidFill>
+            <a:srgbClr val="F8FAFC"/>
+          </a:solidFill>
+          <a:ln w="19050">
+            <a:solidFill>
+              <a:srgbClr val="475569"/>
+            </a:solidFill>
+          </a:ln>
+        </p:spPr>
+        <p:style>
+          <a:lnRef idx="1">
+            <a:schemeClr val="accent1"/>
+          </a:lnRef>
+          <a:fillRef idx="3">
+            <a:schemeClr val="accent1"/>
+          </a:fillRef>
+          <a:effectRef idx="2">
+            <a:schemeClr val="accent1"/>
+          </a:effectRef>
+          <a:fontRef idx="minor">
+            <a:schemeClr val="lt1"/>
+          </a:fontRef>
+        </p:style>
+        <p:txBody>
+          <a:bodyPr rtlCol="0" anchor="t" wrap="none" lIns="0" rIns="0" tIns="115951" bIns="0"/>
+          <a:lstStyle/>
+          <a:p>
+            <a:pPr algn="l" marL="92456">
+              <a:lnSpc>
+                <a:spcPts val="984"/>
+              </a:lnSpc>
+              <a:spcBef>
+                <a:spcPts val="0"/>
+              </a:spcBef>
+              <a:spcAft>
+                <a:spcPts val="0"/>
+              </a:spcAft>
+            </a:pPr>
+            <a:r>
+              <a:rPr sz="1025" b="1">
+                <a:solidFill>
+                  <a:srgbClr val="374151"/>
+                </a:solidFill>
+                <a:latin typeface="Arial"/>
+              </a:rPr>
+              <a:t>Rotary position</a:t>
+            </a:r>
+          </a:p>
+          <a:p>
+            <a:pPr algn="l" marL="92456">
+              <a:lnSpc>
+                <a:spcPts val="873"/>
+              </a:lnSpc>
+              <a:spcBef>
+                <a:spcPts val="296"/>
+              </a:spcBef>
+              <a:spcAft>
+                <a:spcPts val="0"/>
+              </a:spcAft>
+            </a:pPr>
+            <a:r>
+              <a:rPr sz="910">
+                <a:solidFill>
+                  <a:srgbClr val="64748B"/>
+                </a:solidFill>
+                <a:latin typeface="Arial"/>
+              </a:rPr>
+              <a:t>applied to Q and K</a:t>
+            </a:r>
+          </a:p>
+          <a:p>
+            <a:pPr algn="l" marL="92456">
+              <a:lnSpc>
+                <a:spcPts val="873"/>
+              </a:lnSpc>
+              <a:spcBef>
+                <a:spcPts val="486"/>
+              </a:spcBef>
+              <a:spcAft>
+                <a:spcPts val="0"/>
+              </a:spcAft>
+            </a:pPr>
+            <a:r>
+              <a:rPr sz="910">
+                <a:solidFill>
+                  <a:srgbClr val="64748B"/>
+                </a:solidFill>
+                <a:latin typeface="Arial"/>
+              </a:rPr>
+              <a:t>(B, L, d)</a:t>
+            </a:r>
+          </a:p>
+        </p:txBody>
+      </p:sp>
+      <p:sp>
+        <p:nvSpPr>
+          <p:cNvPr id="7" name="Rounded Rectangle 6"/>
+          <p:cNvSpPr/>
+          <p:nvPr/>
+        </p:nvSpPr>
+        <p:spPr>
+          <a:xfrm>
+            <a:off x="4795520" y="731520"/>
+            <a:ext cx="3616960" cy="975360"/>
+          </a:xfrm>
+          <a:prstGeom prst="roundRect">
+            <a:avLst>
+              <a:gd name="adj" fmla="val 4166"/>
+            </a:avLst>
+          </a:prstGeom>
+          <a:noFill/>
+          <a:ln w="19050">
+            <a:solidFill>
+              <a:srgbClr val="E2E8F0"/>
+            </a:solidFill>
+            <a:prstDash val="dash"/>
+          </a:ln>
+        </p:spPr>
+        <p:style>
+          <a:lnRef idx="1">
+            <a:schemeClr val="accent1"/>
+          </a:lnRef>
+          <a:fillRef idx="3">
+            <a:schemeClr val="accent1"/>
+          </a:fillRef>
+          <a:effectRef idx="2">
+            <a:schemeClr val="accent1"/>
+          </a:effectRef>
+          <a:fontRef idx="minor">
+            <a:schemeClr val="lt1"/>
+          </a:fontRef>
+        </p:style>
+        <p:txBody>
+          <a:bodyPr rtlCol="0" anchor="t" wrap="none" lIns="0" rIns="0" tIns="83058" bIns="0"/>
+          <a:lstStyle/>
+          <a:p>
+            <a:pPr algn="l" marL="81280">
+              <a:lnSpc>
+                <a:spcPts val="873"/>
+              </a:lnSpc>
+              <a:spcBef>
+                <a:spcPts val="0"/>
+              </a:spcBef>
+              <a:spcAft>
+                <a:spcPts val="0"/>
+              </a:spcAft>
+            </a:pPr>
+            <a:r>
+              <a:rPr sz="910" b="1">
+                <a:solidFill>
+                  <a:srgbClr val="64748B"/>
+                </a:solidFill>
+                <a:latin typeface="Arial"/>
+              </a:rPr>
+              <a:t>2. Encoder stack  (N = 24)</a:t>
+            </a:r>
+          </a:p>
+        </p:txBody>
+      </p:sp>
+      <p:sp>
+        <p:nvSpPr>
+          <p:cNvPr id="8" name="Rounded Rectangle 7"/>
+          <p:cNvSpPr/>
+          <p:nvPr/>
+        </p:nvSpPr>
+        <p:spPr>
+          <a:xfrm>
+            <a:off x="4958080" y="1056640"/>
+            <a:ext cx="772160" cy="487680"/>
+          </a:xfrm>
+          <a:prstGeom prst="roundRect">
+            <a:avLst>
+              <a:gd name="adj" fmla="val 8333"/>
+            </a:avLst>
+          </a:prstGeom>
+          <a:solidFill>
+            <a:srgbClr val="F8FAFC"/>
+          </a:solidFill>
+          <a:ln w="19050">
+            <a:solidFill>
+              <a:srgbClr val="1E3A5F"/>
+            </a:solidFill>
+          </a:ln>
+        </p:spPr>
+        <p:style>
+          <a:lnRef idx="1">
+            <a:schemeClr val="accent1"/>
+          </a:lnRef>
+          <a:fillRef idx="3">
+            <a:schemeClr val="accent1"/>
+          </a:fillRef>
+          <a:effectRef idx="2">
+            <a:schemeClr val="accent1"/>
+          </a:effectRef>
+          <a:fontRef idx="minor">
+            <a:schemeClr val="lt1"/>
+          </a:fontRef>
+        </p:style>
+        <p:txBody>
+          <a:bodyPr rtlCol="0" anchor="t" wrap="none" lIns="0" rIns="0" tIns="115951" bIns="0"/>
+          <a:lstStyle/>
+          <a:p>
+            <a:pPr algn="l" marL="92456">
+              <a:lnSpc>
+                <a:spcPts val="984"/>
+              </a:lnSpc>
+              <a:spcBef>
+                <a:spcPts val="0"/>
+              </a:spcBef>
+              <a:spcAft>
+                <a:spcPts val="0"/>
+              </a:spcAft>
+            </a:pPr>
+            <a:r>
+              <a:rPr sz="1025" b="1">
+                <a:solidFill>
+                  <a:srgbClr val="374151"/>
+                </a:solidFill>
+                <a:latin typeface="Arial"/>
+              </a:rPr>
+              <a:t>Block 1</a:t>
+            </a:r>
+          </a:p>
+          <a:p>
+            <a:pPr algn="l" marL="92456">
+              <a:lnSpc>
+                <a:spcPts val="873"/>
+              </a:lnSpc>
+              <a:spcBef>
+                <a:spcPts val="376"/>
+              </a:spcBef>
+              <a:spcAft>
+                <a:spcPts val="0"/>
+              </a:spcAft>
+            </a:pPr>
+            <a:r>
+              <a:rPr sz="910">
+                <a:solidFill>
+                  <a:srgbClr val="64748B"/>
+                </a:solidFill>
+                <a:latin typeface="Arial"/>
+              </a:rPr>
+              <a:t>(B, L, d)</a:t>
+            </a:r>
+          </a:p>
+        </p:txBody>
+      </p:sp>
+      <p:sp>
+        <p:nvSpPr>
+          <p:cNvPr id="9" name="Rounded Rectangle 8"/>
+          <p:cNvSpPr/>
+          <p:nvPr/>
+        </p:nvSpPr>
+        <p:spPr>
+          <a:xfrm>
+            <a:off x="5892800" y="1056640"/>
+            <a:ext cx="772160" cy="487680"/>
           </a:xfrm>
           <a:prstGeom prst="roundRect">
             <a:avLst>
@@ -3744,12 +4117,12 @@
           </a:fontRef>
         </p:style>
         <p:txBody>
-          <a:bodyPr rtlCol="0" anchor="t" wrap="none" lIns="0" rIns="0" tIns="104140" bIns="0"/>
+          <a:bodyPr rtlCol="0" anchor="t" wrap="none" lIns="0" rIns="0" tIns="115951" bIns="0"/>
           <a:lstStyle/>
           <a:p>
-            <a:pPr algn="l" marL="81280">
+            <a:pPr algn="l" marL="92456">
               <a:lnSpc>
-                <a:spcPts val="864"/>
+                <a:spcPts val="984"/>
               </a:lnSpc>
               <a:spcBef>
                 <a:spcPts val="0"/>
@@ -3759,51 +4132,29 @@
               </a:spcAft>
             </a:pPr>
             <a:r>
-              <a:rPr sz="900" b="1">
+              <a:rPr sz="1025" b="1">
                 <a:solidFill>
                   <a:srgbClr val="374151"/>
                 </a:solidFill>
                 <a:latin typeface="Arial"/>
               </a:rPr>
-              <a:t>Embedding</a:t>
-            </a:r>
-          </a:p>
-          <a:p>
-            <a:pPr algn="l" marL="81280">
+              <a:t>Block 2</a:t>
+            </a:r>
+          </a:p>
+          <a:p>
+            <a:pPr algn="l" marL="92456">
               <a:lnSpc>
-                <a:spcPts val="768"/>
+                <a:spcPts val="873"/>
               </a:lnSpc>
               <a:spcBef>
-                <a:spcPts val="96"/>
+                <a:spcPts val="376"/>
               </a:spcBef>
               <a:spcAft>
                 <a:spcPts val="0"/>
               </a:spcAft>
             </a:pPr>
             <a:r>
-              <a:rPr sz="800">
-                <a:solidFill>
-                  <a:srgbClr val="64748B"/>
-                </a:solidFill>
-                <a:latin typeface="Arial"/>
-              </a:rPr>
-              <a:t>vocab 32k, weight-tied</a:t>
-            </a:r>
-          </a:p>
-          <a:p>
-            <a:pPr algn="l" marL="81280">
-              <a:lnSpc>
-                <a:spcPts val="768"/>
-              </a:lnSpc>
-              <a:spcBef>
-                <a:spcPts val="272"/>
-              </a:spcBef>
-              <a:spcAft>
-                <a:spcPts val="0"/>
-              </a:spcAft>
-            </a:pPr>
-            <a:r>
-              <a:rPr sz="800">
+              <a:rPr sz="910">
                 <a:solidFill>
                   <a:srgbClr val="64748B"/>
                 </a:solidFill>
@@ -3816,14 +4167,76 @@
       </p:sp>
       <p:sp>
         <p:nvSpPr>
-          <p:cNvPr id="6" name="Rounded Rectangle 5"/>
+          <p:cNvPr id="10" name="Rectangle 9"/>
           <p:cNvSpPr/>
           <p:nvPr/>
         </p:nvSpPr>
         <p:spPr>
           <a:xfrm>
-            <a:off x="2844800" y="1016000"/>
-            <a:ext cx="1137920" cy="487680"/>
+            <a:off x="6827520" y="1097280"/>
+            <a:ext cx="487680" cy="365760"/>
+          </a:xfrm>
+          <a:prstGeom prst="rect">
+            <a:avLst/>
+          </a:prstGeom>
+          <a:solidFill>
+            <a:srgbClr val="FFFFFF"/>
+          </a:solidFill>
+          <a:ln>
+            <a:noFill/>
+          </a:ln>
+        </p:spPr>
+        <p:style>
+          <a:lnRef idx="1">
+            <a:schemeClr val="accent1"/>
+          </a:lnRef>
+          <a:fillRef idx="3">
+            <a:schemeClr val="accent1"/>
+          </a:fillRef>
+          <a:effectRef idx="2">
+            <a:schemeClr val="accent1"/>
+          </a:effectRef>
+          <a:fontRef idx="minor">
+            <a:schemeClr val="lt1"/>
+          </a:fontRef>
+        </p:style>
+        <p:txBody>
+          <a:bodyPr rtlCol="0" anchor="t" wrap="none" lIns="0" rIns="0" tIns="176911" bIns="0"/>
+          <a:lstStyle/>
+          <a:p>
+            <a:pPr algn="ctr">
+              <a:lnSpc>
+                <a:spcPts val="984"/>
+              </a:lnSpc>
+              <a:spcBef>
+                <a:spcPts val="0"/>
+              </a:spcBef>
+              <a:spcAft>
+                <a:spcPts val="0"/>
+              </a:spcAft>
+            </a:pPr>
+            <a:r>
+              <a:rPr sz="1025" b="1">
+                <a:solidFill>
+                  <a:srgbClr val="64748B"/>
+                </a:solidFill>
+                <a:latin typeface="Arial"/>
+              </a:rPr>
+              <a:t>• • •</a:t>
+            </a:r>
+          </a:p>
+        </p:txBody>
+      </p:sp>
+      <p:sp>
+        <p:nvSpPr>
+          <p:cNvPr id="11" name="Rounded Rectangle 10"/>
+          <p:cNvSpPr/>
+          <p:nvPr/>
+        </p:nvSpPr>
+        <p:spPr>
+          <a:xfrm>
+            <a:off x="7477760" y="1056640"/>
+            <a:ext cx="772160" cy="487680"/>
           </a:xfrm>
           <a:prstGeom prst="roundRect">
             <a:avLst>
@@ -3854,12 +4267,12 @@
           </a:fontRef>
         </p:style>
         <p:txBody>
-          <a:bodyPr rtlCol="0" anchor="t" wrap="none" lIns="0" rIns="0" tIns="104140" bIns="0"/>
+          <a:bodyPr rtlCol="0" anchor="t" wrap="none" lIns="0" rIns="0" tIns="115951" bIns="0"/>
           <a:lstStyle/>
           <a:p>
-            <a:pPr algn="l" marL="81280">
+            <a:pPr algn="l" marL="92456">
               <a:lnSpc>
-                <a:spcPts val="864"/>
+                <a:spcPts val="984"/>
               </a:lnSpc>
               <a:spcBef>
                 <a:spcPts val="0"/>
@@ -3869,51 +4282,29 @@
               </a:spcAft>
             </a:pPr>
             <a:r>
-              <a:rPr sz="900" b="1">
+              <a:rPr sz="1025" b="1">
                 <a:solidFill>
                   <a:srgbClr val="374151"/>
                 </a:solidFill>
                 <a:latin typeface="Arial"/>
               </a:rPr>
-              <a:t>Rotary position</a:t>
-            </a:r>
-          </a:p>
-          <a:p>
-            <a:pPr algn="l" marL="81280">
+              <a:t>Block N</a:t>
+            </a:r>
+          </a:p>
+          <a:p>
+            <a:pPr algn="l" marL="92456">
               <a:lnSpc>
-                <a:spcPts val="768"/>
+                <a:spcPts val="873"/>
               </a:lnSpc>
               <a:spcBef>
-                <a:spcPts val="96"/>
+                <a:spcPts val="376"/>
               </a:spcBef>
               <a:spcAft>
                 <a:spcPts val="0"/>
               </a:spcAft>
             </a:pPr>
             <a:r>
-              <a:rPr sz="800">
-                <a:solidFill>
-                  <a:srgbClr val="64748B"/>
-                </a:solidFill>
-                <a:latin typeface="Arial"/>
-              </a:rPr>
-              <a:t>applied to Q and K</a:t>
-            </a:r>
-          </a:p>
-          <a:p>
-            <a:pPr algn="l" marL="81280">
-              <a:lnSpc>
-                <a:spcPts val="768"/>
-              </a:lnSpc>
-              <a:spcBef>
-                <a:spcPts val="272"/>
-              </a:spcBef>
-              <a:spcAft>
-                <a:spcPts val="0"/>
-              </a:spcAft>
-            </a:pPr>
-            <a:r>
-              <a:rPr sz="800">
+              <a:rPr sz="910">
                 <a:solidFill>
                   <a:srgbClr val="64748B"/>
                 </a:solidFill>
@@ -3926,18 +4317,18 @@
       </p:sp>
       <p:sp>
         <p:nvSpPr>
-          <p:cNvPr id="7" name="Rounded Rectangle 6"/>
+          <p:cNvPr id="12" name="Rounded Rectangle 11"/>
           <p:cNvSpPr/>
           <p:nvPr/>
         </p:nvSpPr>
         <p:spPr>
           <a:xfrm>
-            <a:off x="4226560" y="731520"/>
-            <a:ext cx="3169920" cy="772160"/>
+            <a:off x="325120" y="2032000"/>
+            <a:ext cx="4389120" cy="1137920"/>
           </a:xfrm>
           <a:prstGeom prst="roundRect">
             <a:avLst>
-              <a:gd name="adj" fmla="val 5263"/>
+              <a:gd name="adj" fmla="val 3571"/>
             </a:avLst>
           </a:prstGeom>
           <a:noFill/>
@@ -3963,12 +4354,12 @@
           </a:fontRef>
         </p:style>
         <p:txBody>
-          <a:bodyPr rtlCol="0" anchor="t" wrap="none" lIns="0" rIns="0" tIns="91440" bIns="0"/>
+          <a:bodyPr rtlCol="0" anchor="t" wrap="none" lIns="0" rIns="0" tIns="83058" bIns="0"/>
           <a:lstStyle/>
           <a:p>
             <a:pPr algn="l" marL="81280">
               <a:lnSpc>
-                <a:spcPts val="768"/>
+                <a:spcPts val="873"/>
               </a:lnSpc>
               <a:spcBef>
                 <a:spcPts val="0"/>
@@ -3978,119 +4369,31 @@
               </a:spcAft>
             </a:pPr>
             <a:r>
-              <a:rPr sz="800" b="1">
+              <a:rPr sz="910" b="1">
                 <a:solidFill>
                   <a:srgbClr val="64748B"/>
                 </a:solidFill>
                 <a:latin typeface="Arial"/>
               </a:rPr>
-              <a:t>2. Encoder stack  (N = 24)</a:t>
-            </a:r>
-          </a:p>
-        </p:txBody>
-      </p:sp>
-      <p:sp>
-        <p:nvSpPr>
-          <p:cNvPr id="8" name="Rounded Rectangle 7"/>
+              <a:t>3. Head</a:t>
+            </a:r>
+          </a:p>
+        </p:txBody>
+      </p:sp>
+      <p:sp>
+        <p:nvSpPr>
+          <p:cNvPr id="13" name="Rounded Rectangle 12"/>
           <p:cNvSpPr/>
           <p:nvPr/>
         </p:nvSpPr>
         <p:spPr>
           <a:xfrm>
-            <a:off x="4348480" y="1016000"/>
-            <a:ext cx="690880" cy="365760"/>
+            <a:off x="487680" y="2357120"/>
+            <a:ext cx="1422400" cy="650240"/>
           </a:xfrm>
           <a:prstGeom prst="roundRect">
             <a:avLst>
-              <a:gd name="adj" fmla="val 11111"/>
-            </a:avLst>
-          </a:prstGeom>
-          <a:solidFill>
-            <a:srgbClr val="F8FAFC"/>
-          </a:solidFill>
-          <a:ln w="19050">
-            <a:solidFill>
-              <a:srgbClr val="1E3A5F"/>
-            </a:solidFill>
-          </a:ln>
-        </p:spPr>
-        <p:style>
-          <a:lnRef idx="1">
-            <a:schemeClr val="accent1"/>
-          </a:lnRef>
-          <a:fillRef idx="3">
-            <a:schemeClr val="accent1"/>
-          </a:fillRef>
-          <a:effectRef idx="2">
-            <a:schemeClr val="accent1"/>
-          </a:effectRef>
-          <a:fontRef idx="minor">
-            <a:schemeClr val="lt1"/>
-          </a:fontRef>
-        </p:style>
-        <p:txBody>
-          <a:bodyPr rtlCol="0" anchor="t" wrap="none" lIns="0" rIns="0" tIns="104140" bIns="0"/>
-          <a:lstStyle/>
-          <a:p>
-            <a:pPr algn="l" marL="81280">
-              <a:lnSpc>
-                <a:spcPts val="864"/>
-              </a:lnSpc>
-              <a:spcBef>
-                <a:spcPts val="0"/>
-              </a:spcBef>
-              <a:spcAft>
-                <a:spcPts val="0"/>
-              </a:spcAft>
-            </a:pPr>
-            <a:r>
-              <a:rPr sz="900" b="1">
-                <a:solidFill>
-                  <a:srgbClr val="374151"/>
-                </a:solidFill>
-                <a:latin typeface="Arial"/>
-              </a:rPr>
-              <a:t>Block 1</a:t>
-            </a:r>
-          </a:p>
-          <a:p>
-            <a:pPr algn="l" marL="81280">
-              <a:lnSpc>
-                <a:spcPts val="768"/>
-              </a:lnSpc>
-              <a:spcBef>
-                <a:spcPts val="176"/>
-              </a:spcBef>
-              <a:spcAft>
-                <a:spcPts val="0"/>
-              </a:spcAft>
-            </a:pPr>
-            <a:r>
-              <a:rPr sz="800">
-                <a:solidFill>
-                  <a:srgbClr val="64748B"/>
-                </a:solidFill>
-                <a:latin typeface="Arial"/>
-              </a:rPr>
-              <a:t>(B, L, d)</a:t>
-            </a:r>
-          </a:p>
-        </p:txBody>
-      </p:sp>
-      <p:sp>
-        <p:nvSpPr>
-          <p:cNvPr id="9" name="Rounded Rectangle 8"/>
-          <p:cNvSpPr/>
-          <p:nvPr/>
-        </p:nvSpPr>
-        <p:spPr>
-          <a:xfrm>
-            <a:off x="5161280" y="1016000"/>
-            <a:ext cx="690880" cy="365760"/>
-          </a:xfrm>
-          <a:prstGeom prst="roundRect">
-            <a:avLst>
-              <a:gd name="adj" fmla="val 11111"/>
+              <a:gd name="adj" fmla="val 6250"/>
             </a:avLst>
           </a:prstGeom>
           <a:solidFill>
@@ -4117,12 +4420,12 @@
           </a:fontRef>
         </p:style>
         <p:txBody>
-          <a:bodyPr rtlCol="0" anchor="t" wrap="none" lIns="0" rIns="0" tIns="104140" bIns="0"/>
+          <a:bodyPr rtlCol="0" anchor="t" wrap="none" lIns="0" rIns="0" tIns="115951" bIns="0"/>
           <a:lstStyle/>
           <a:p>
-            <a:pPr algn="l" marL="81280">
+            <a:pPr algn="l" marL="92456">
               <a:lnSpc>
-                <a:spcPts val="864"/>
+                <a:spcPts val="984"/>
               </a:lnSpc>
               <a:spcBef>
                 <a:spcPts val="0"/>
@@ -4132,115 +4435,75 @@
               </a:spcAft>
             </a:pPr>
             <a:r>
-              <a:rPr sz="900" b="1">
+              <a:rPr sz="1025" b="1">
                 <a:solidFill>
                   <a:srgbClr val="374151"/>
                 </a:solidFill>
                 <a:latin typeface="Arial"/>
               </a:rPr>
-              <a:t>Block 2</a:t>
-            </a:r>
-          </a:p>
-          <a:p>
-            <a:pPr algn="l" marL="81280">
+              <a:t>Mean pool</a:t>
+            </a:r>
+          </a:p>
+          <a:p>
+            <a:pPr algn="l" marL="92456">
               <a:lnSpc>
-                <a:spcPts val="768"/>
+                <a:spcPts val="873"/>
               </a:lnSpc>
               <a:spcBef>
-                <a:spcPts val="176"/>
+                <a:spcPts val="296"/>
               </a:spcBef>
               <a:spcAft>
                 <a:spcPts val="0"/>
               </a:spcAft>
             </a:pPr>
             <a:r>
-              <a:rPr sz="800">
+              <a:rPr sz="910">
                 <a:solidFill>
                   <a:srgbClr val="64748B"/>
                 </a:solidFill>
                 <a:latin typeface="Arial"/>
               </a:rPr>
-              <a:t>(B, L, d)</a:t>
-            </a:r>
-          </a:p>
-        </p:txBody>
-      </p:sp>
-      <p:sp>
-        <p:nvSpPr>
-          <p:cNvPr id="10" name="Rectangle 9"/>
+              <a:t>masked over padding</a:t>
+            </a:r>
+          </a:p>
+          <a:p>
+            <a:pPr algn="l" marL="92456">
+              <a:lnSpc>
+                <a:spcPts val="873"/>
+              </a:lnSpc>
+              <a:spcBef>
+                <a:spcPts val="486"/>
+              </a:spcBef>
+              <a:spcAft>
+                <a:spcPts val="0"/>
+              </a:spcAft>
+            </a:pPr>
+            <a:r>
+              <a:rPr sz="910">
+                <a:solidFill>
+                  <a:srgbClr val="64748B"/>
+                </a:solidFill>
+                <a:latin typeface="Arial"/>
+              </a:rPr>
+              <a:t>(B, d)</a:t>
+            </a:r>
+          </a:p>
+        </p:txBody>
+      </p:sp>
+      <p:sp>
+        <p:nvSpPr>
+          <p:cNvPr id="14" name="Rounded Rectangle 13"/>
           <p:cNvSpPr/>
           <p:nvPr/>
         </p:nvSpPr>
         <p:spPr>
           <a:xfrm>
-            <a:off x="5974080" y="1016000"/>
-            <a:ext cx="447040" cy="325120"/>
-          </a:xfrm>
-          <a:prstGeom prst="rect">
-            <a:avLst/>
-          </a:prstGeom>
-          <a:solidFill>
-            <a:srgbClr val="FFFFFF"/>
-          </a:solidFill>
-          <a:ln>
-            <a:noFill/>
-          </a:ln>
-        </p:spPr>
-        <p:style>
-          <a:lnRef idx="1">
-            <a:schemeClr val="accent1"/>
-          </a:lnRef>
-          <a:fillRef idx="3">
-            <a:schemeClr val="accent1"/>
-          </a:fillRef>
-          <a:effectRef idx="2">
-            <a:schemeClr val="accent1"/>
-          </a:effectRef>
-          <a:fontRef idx="minor">
-            <a:schemeClr val="lt1"/>
-          </a:fontRef>
-        </p:style>
-        <p:txBody>
-          <a:bodyPr rtlCol="0" anchor="t" wrap="none" lIns="0" rIns="0" tIns="160020" bIns="0"/>
-          <a:lstStyle/>
-          <a:p>
-            <a:pPr algn="ctr">
-              <a:lnSpc>
-                <a:spcPts val="864"/>
-              </a:lnSpc>
-              <a:spcBef>
-                <a:spcPts val="0"/>
-              </a:spcBef>
-              <a:spcAft>
-                <a:spcPts val="0"/>
-              </a:spcAft>
-            </a:pPr>
-            <a:r>
-              <a:rPr sz="900" b="1">
-                <a:solidFill>
-                  <a:srgbClr val="64748B"/>
-                </a:solidFill>
-                <a:latin typeface="Arial"/>
-              </a:rPr>
-              <a:t>• • •</a:t>
-            </a:r>
-          </a:p>
-        </p:txBody>
-      </p:sp>
-      <p:sp>
-        <p:nvSpPr>
-          <p:cNvPr id="11" name="Rounded Rectangle 10"/>
-          <p:cNvSpPr/>
-          <p:nvPr/>
-        </p:nvSpPr>
-        <p:spPr>
-          <a:xfrm>
-            <a:off x="6543040" y="1016000"/>
-            <a:ext cx="731520" cy="365760"/>
+            <a:off x="2072640" y="2357120"/>
+            <a:ext cx="975360" cy="650240"/>
           </a:xfrm>
           <a:prstGeom prst="roundRect">
             <a:avLst>
-              <a:gd name="adj" fmla="val 11111"/>
+              <a:gd name="adj" fmla="val 6250"/>
             </a:avLst>
           </a:prstGeom>
           <a:solidFill>
@@ -4267,12 +4530,12 @@
           </a:fontRef>
         </p:style>
         <p:txBody>
-          <a:bodyPr rtlCol="0" anchor="t" wrap="none" lIns="0" rIns="0" tIns="104140" bIns="0"/>
+          <a:bodyPr rtlCol="0" anchor="t" wrap="none" lIns="0" rIns="0" tIns="115951" bIns="0"/>
           <a:lstStyle/>
           <a:p>
-            <a:pPr algn="l" marL="81280">
+            <a:pPr algn="l" marL="92456">
               <a:lnSpc>
-                <a:spcPts val="864"/>
+                <a:spcPts val="984"/>
               </a:lnSpc>
               <a:spcBef>
                 <a:spcPts val="0"/>
@@ -4282,53 +4545,185 @@
               </a:spcAft>
             </a:pPr>
             <a:r>
-              <a:rPr sz="900" b="1">
+              <a:rPr sz="1025" b="1">
                 <a:solidFill>
                   <a:srgbClr val="374151"/>
                 </a:solidFill>
                 <a:latin typeface="Arial"/>
               </a:rPr>
-              <a:t>Block N</a:t>
-            </a:r>
-          </a:p>
-          <a:p>
-            <a:pPr algn="l" marL="81280">
+              <a:t>Task head</a:t>
+            </a:r>
+          </a:p>
+          <a:p>
+            <a:pPr algn="l" marL="92456">
               <a:lnSpc>
-                <a:spcPts val="768"/>
+                <a:spcPts val="873"/>
               </a:lnSpc>
               <a:spcBef>
-                <a:spcPts val="176"/>
+                <a:spcPts val="296"/>
               </a:spcBef>
               <a:spcAft>
                 <a:spcPts val="0"/>
               </a:spcAft>
             </a:pPr>
             <a:r>
-              <a:rPr sz="800">
+              <a:rPr sz="910">
                 <a:solidFill>
                   <a:srgbClr val="64748B"/>
                 </a:solidFill>
                 <a:latin typeface="Arial"/>
               </a:rPr>
-              <a:t>(B, L, d)</a:t>
-            </a:r>
-          </a:p>
-        </p:txBody>
-      </p:sp>
-      <p:sp>
-        <p:nvSpPr>
-          <p:cNvPr id="12" name="Rounded Rectangle 11"/>
+              <a:t>Linear d to C</a:t>
+            </a:r>
+          </a:p>
+          <a:p>
+            <a:pPr algn="l" marL="92456">
+              <a:lnSpc>
+                <a:spcPts val="873"/>
+              </a:lnSpc>
+              <a:spcBef>
+                <a:spcPts val="486"/>
+              </a:spcBef>
+              <a:spcAft>
+                <a:spcPts val="0"/>
+              </a:spcAft>
+            </a:pPr>
+            <a:r>
+              <a:rPr sz="910">
+                <a:solidFill>
+                  <a:srgbClr val="64748B"/>
+                </a:solidFill>
+                <a:latin typeface="Arial"/>
+              </a:rPr>
+              <a:t>(B, C)</a:t>
+            </a:r>
+          </a:p>
+        </p:txBody>
+      </p:sp>
+      <p:sp>
+        <p:nvSpPr>
+          <p:cNvPr id="15" name="Rounded Rectangle 14"/>
           <p:cNvSpPr/>
           <p:nvPr/>
         </p:nvSpPr>
         <p:spPr>
           <a:xfrm>
-            <a:off x="7518400" y="731520"/>
-            <a:ext cx="3860800" cy="894080"/>
+            <a:off x="3210560" y="2357120"/>
+            <a:ext cx="1341120" cy="650240"/>
           </a:xfrm>
           <a:prstGeom prst="roundRect">
             <a:avLst>
-              <a:gd name="adj" fmla="val 4545"/>
+              <a:gd name="adj" fmla="val 6250"/>
+            </a:avLst>
+          </a:prstGeom>
+          <a:solidFill>
+            <a:srgbClr val="FFFFFF"/>
+          </a:solidFill>
+          <a:ln w="19050">
+            <a:solidFill>
+              <a:srgbClr val="B45309"/>
+            </a:solidFill>
+          </a:ln>
+        </p:spPr>
+        <p:style>
+          <a:lnRef idx="1">
+            <a:schemeClr val="accent1"/>
+          </a:lnRef>
+          <a:fillRef idx="3">
+            <a:schemeClr val="accent1"/>
+          </a:fillRef>
+          <a:effectRef idx="2">
+            <a:schemeClr val="accent1"/>
+          </a:effectRef>
+          <a:fontRef idx="minor">
+            <a:schemeClr val="lt1"/>
+          </a:fontRef>
+        </p:style>
+        <p:txBody>
+          <a:bodyPr rtlCol="0" anchor="t" wrap="none" lIns="0" rIns="0" tIns="115951" bIns="0"/>
+          <a:lstStyle/>
+          <a:p>
+            <a:pPr algn="l" marL="92456">
+              <a:lnSpc>
+                <a:spcPts val="984"/>
+              </a:lnSpc>
+              <a:spcBef>
+                <a:spcPts val="0"/>
+              </a:spcBef>
+              <a:spcAft>
+                <a:spcPts val="0"/>
+              </a:spcAft>
+            </a:pPr>
+            <a:r>
+              <a:rPr sz="1025" b="1">
+                <a:solidFill>
+                  <a:srgbClr val="374151"/>
+                </a:solidFill>
+                <a:latin typeface="Arial"/>
+              </a:rPr>
+              <a:t>Cross-entropy</a:t>
+            </a:r>
+          </a:p>
+          <a:p>
+            <a:pPr algn="l" marL="92456">
+              <a:lnSpc>
+                <a:spcPts val="873"/>
+              </a:lnSpc>
+              <a:spcBef>
+                <a:spcPts val="296"/>
+              </a:spcBef>
+              <a:spcAft>
+                <a:spcPts val="0"/>
+              </a:spcAft>
+            </a:pPr>
+            <a:r>
+              <a:rPr sz="910">
+                <a:solidFill>
+                  <a:srgbClr val="64748B"/>
+                </a:solidFill>
+                <a:latin typeface="Arial"/>
+              </a:rPr>
+              <a:t>label smoothing 0.1</a:t>
+            </a:r>
+          </a:p>
+          <a:p>
+            <a:pPr algn="l" marL="92456">
+              <a:lnSpc>
+                <a:spcPts val="873"/>
+              </a:lnSpc>
+              <a:spcBef>
+                <a:spcPts val="486"/>
+              </a:spcBef>
+              <a:spcAft>
+                <a:spcPts val="0"/>
+              </a:spcAft>
+            </a:pPr>
+            <a:r>
+              <a:rPr sz="910">
+                <a:solidFill>
+                  <a:srgbClr val="64748B"/>
+                </a:solidFill>
+                <a:latin typeface="Arial"/>
+              </a:rPr>
+              <a:t>scalar</a:t>
+            </a:r>
+          </a:p>
+        </p:txBody>
+      </p:sp>
+      <p:sp>
+        <p:nvSpPr>
+          <p:cNvPr id="16" name="Rounded Rectangle 15"/>
+          <p:cNvSpPr/>
+          <p:nvPr/>
+        </p:nvSpPr>
+        <p:spPr>
+          <a:xfrm>
+            <a:off x="4876800" y="2032000"/>
+            <a:ext cx="6949440" cy="1463040"/>
+          </a:xfrm>
+          <a:prstGeom prst="roundRect">
+            <a:avLst>
+              <a:gd name="adj" fmla="val 2777"/>
             </a:avLst>
           </a:prstGeom>
           <a:noFill/>
@@ -4354,12 +4749,12 @@
           </a:fontRef>
         </p:style>
         <p:txBody>
-          <a:bodyPr rtlCol="0" anchor="t" wrap="none" lIns="0" rIns="0" tIns="91440" bIns="0"/>
+          <a:bodyPr rtlCol="0" anchor="t" wrap="none" lIns="0" rIns="0" tIns="83058" bIns="0"/>
           <a:lstStyle/>
           <a:p>
             <a:pPr algn="l" marL="81280">
               <a:lnSpc>
-                <a:spcPts val="768"/>
+                <a:spcPts val="873"/>
               </a:lnSpc>
               <a:spcBef>
                 <a:spcPts val="0"/>
@@ -4369,27 +4764,73 @@
               </a:spcAft>
             </a:pPr>
             <a:r>
-              <a:rPr sz="800" b="1">
+              <a:rPr sz="910" b="1">
                 <a:solidFill>
                   <a:srgbClr val="64748B"/>
                 </a:solidFill>
                 <a:latin typeface="Arial"/>
               </a:rPr>
-              <a:t>3. Head</a:t>
-            </a:r>
-          </a:p>
-        </p:txBody>
-      </p:sp>
-      <p:sp>
-        <p:nvSpPr>
-          <p:cNvPr id="13" name="Rounded Rectangle 12"/>
+              <a:t>4. Self-attention sub-block  (pre-norm residual)</a:t>
+            </a:r>
+          </a:p>
+        </p:txBody>
+      </p:sp>
+      <p:sp>
+        <p:nvSpPr>
+          <p:cNvPr id="17" name="Rounded Rectangle 16"/>
           <p:cNvSpPr/>
           <p:nvPr/>
         </p:nvSpPr>
         <p:spPr>
           <a:xfrm>
-            <a:off x="7640320" y="1016000"/>
-            <a:ext cx="1300480" cy="487680"/>
+            <a:off x="5039360" y="2357120"/>
+            <a:ext cx="6624320" cy="975360"/>
+          </a:xfrm>
+          <a:prstGeom prst="roundRect">
+            <a:avLst>
+              <a:gd name="adj" fmla="val 4166"/>
+            </a:avLst>
+          </a:prstGeom>
+          <a:noFill/>
+          <a:ln w="19050">
+            <a:solidFill>
+              <a:srgbClr val="64748B"/>
+            </a:solidFill>
+            <a:prstDash val="dash"/>
+          </a:ln>
+        </p:spPr>
+        <p:style>
+          <a:lnRef idx="1">
+            <a:schemeClr val="accent1"/>
+          </a:lnRef>
+          <a:fillRef idx="3">
+            <a:schemeClr val="accent1"/>
+          </a:fillRef>
+          <a:effectRef idx="2">
+            <a:schemeClr val="accent1"/>
+          </a:effectRef>
+          <a:fontRef idx="minor">
+            <a:schemeClr val="lt1"/>
+          </a:fontRef>
+        </p:style>
+        <p:txBody>
+          <a:bodyPr rtlCol="0" anchor="ctr"/>
+          <a:lstStyle/>
+          <a:p>
+            <a:pPr algn="ctr"/>
+          </a:p>
+        </p:txBody>
+      </p:sp>
+      <p:sp>
+        <p:nvSpPr>
+          <p:cNvPr id="18" name="Rounded Rectangle 17"/>
+          <p:cNvSpPr/>
+          <p:nvPr/>
+        </p:nvSpPr>
+        <p:spPr>
+          <a:xfrm>
+            <a:off x="5201920" y="2600960"/>
+            <a:ext cx="975360" cy="487680"/>
           </a:xfrm>
           <a:prstGeom prst="roundRect">
             <a:avLst>
@@ -4420,12 +4861,12 @@
           </a:fontRef>
         </p:style>
         <p:txBody>
-          <a:bodyPr rtlCol="0" anchor="t" wrap="none" lIns="0" rIns="0" tIns="104140" bIns="0"/>
+          <a:bodyPr rtlCol="0" anchor="t" wrap="none" lIns="0" rIns="0" tIns="115951" bIns="0"/>
           <a:lstStyle/>
           <a:p>
-            <a:pPr algn="l" marL="81280">
+            <a:pPr algn="l" marL="92456">
               <a:lnSpc>
-                <a:spcPts val="864"/>
+                <a:spcPts val="984"/>
               </a:lnSpc>
               <a:spcBef>
                 <a:spcPts val="0"/>
@@ -4435,71 +4876,269 @@
               </a:spcAft>
             </a:pPr>
             <a:r>
-              <a:rPr sz="900" b="1">
+              <a:rPr sz="1025" b="1">
                 <a:solidFill>
                   <a:srgbClr val="374151"/>
                 </a:solidFill>
                 <a:latin typeface="Arial"/>
               </a:rPr>
-              <a:t>Mean pool</a:t>
-            </a:r>
-          </a:p>
-          <a:p>
-            <a:pPr algn="l" marL="81280">
+              <a:t>LayerNorm</a:t>
+            </a:r>
+          </a:p>
+          <a:p>
+            <a:pPr algn="l" marL="92456">
               <a:lnSpc>
-                <a:spcPts val="768"/>
+                <a:spcPts val="873"/>
               </a:lnSpc>
               <a:spcBef>
-                <a:spcPts val="96"/>
+                <a:spcPts val="376"/>
               </a:spcBef>
               <a:spcAft>
                 <a:spcPts val="0"/>
               </a:spcAft>
             </a:pPr>
             <a:r>
-              <a:rPr sz="800">
+              <a:rPr sz="910">
                 <a:solidFill>
                   <a:srgbClr val="64748B"/>
                 </a:solidFill>
                 <a:latin typeface="Arial"/>
               </a:rPr>
-              <a:t>masked over padding</a:t>
-            </a:r>
-          </a:p>
-          <a:p>
-            <a:pPr algn="l" marL="81280">
+              <a:t>(B, L, d)</a:t>
+            </a:r>
+          </a:p>
+        </p:txBody>
+      </p:sp>
+      <p:sp>
+        <p:nvSpPr>
+          <p:cNvPr id="19" name="Rounded Rectangle 18"/>
+          <p:cNvSpPr/>
+          <p:nvPr/>
+        </p:nvSpPr>
+        <p:spPr>
+          <a:xfrm>
+            <a:off x="6339840" y="2519680"/>
+            <a:ext cx="1259840" cy="650240"/>
+          </a:xfrm>
+          <a:prstGeom prst="roundRect">
+            <a:avLst>
+              <a:gd name="adj" fmla="val 6250"/>
+            </a:avLst>
+          </a:prstGeom>
+          <a:solidFill>
+            <a:srgbClr val="F8FAFC"/>
+          </a:solidFill>
+          <a:ln w="19050">
+            <a:solidFill>
+              <a:srgbClr val="475569"/>
+            </a:solidFill>
+          </a:ln>
+        </p:spPr>
+        <p:style>
+          <a:lnRef idx="1">
+            <a:schemeClr val="accent1"/>
+          </a:lnRef>
+          <a:fillRef idx="3">
+            <a:schemeClr val="accent1"/>
+          </a:fillRef>
+          <a:effectRef idx="2">
+            <a:schemeClr val="accent1"/>
+          </a:effectRef>
+          <a:fontRef idx="minor">
+            <a:schemeClr val="lt1"/>
+          </a:fontRef>
+        </p:style>
+        <p:txBody>
+          <a:bodyPr rtlCol="0" anchor="t" wrap="none" lIns="0" rIns="0" tIns="115951" bIns="0"/>
+          <a:lstStyle/>
+          <a:p>
+            <a:pPr algn="l" marL="92456">
               <a:lnSpc>
-                <a:spcPts val="768"/>
+                <a:spcPts val="984"/>
               </a:lnSpc>
               <a:spcBef>
-                <a:spcPts val="272"/>
+                <a:spcPts val="0"/>
               </a:spcBef>
               <a:spcAft>
                 <a:spcPts val="0"/>
               </a:spcAft>
             </a:pPr>
             <a:r>
-              <a:rPr sz="800">
-                <a:solidFill>
-                  <a:srgbClr val="64748B"/>
+              <a:rPr sz="1025" b="1">
+                <a:solidFill>
+                  <a:srgbClr val="374151"/>
                 </a:solidFill>
                 <a:latin typeface="Arial"/>
               </a:rPr>
-              <a:t>(B, d)</a:t>
-            </a:r>
-          </a:p>
-        </p:txBody>
-      </p:sp>
-      <p:sp>
-        <p:nvSpPr>
-          <p:cNvPr id="14" name="Rounded Rectangle 13"/>
+              <a:t>QKV projection</a:t>
+            </a:r>
+          </a:p>
+          <a:p>
+            <a:pPr algn="l" marL="92456">
+              <a:lnSpc>
+                <a:spcPts val="873"/>
+              </a:lnSpc>
+              <a:spcBef>
+                <a:spcPts val="296"/>
+              </a:spcBef>
+              <a:spcAft>
+                <a:spcPts val="0"/>
+              </a:spcAft>
+            </a:pPr>
+            <a:r>
+              <a:rPr sz="910">
+                <a:solidFill>
+                  <a:srgbClr val="64748B"/>
+                </a:solidFill>
+                <a:latin typeface="Arial"/>
+              </a:rPr>
+              <a:t>3 x Linear d to d</a:t>
+            </a:r>
+          </a:p>
+          <a:p>
+            <a:pPr algn="l" marL="92456">
+              <a:lnSpc>
+                <a:spcPts val="873"/>
+              </a:lnSpc>
+              <a:spcBef>
+                <a:spcPts val="486"/>
+              </a:spcBef>
+              <a:spcAft>
+                <a:spcPts val="0"/>
+              </a:spcAft>
+            </a:pPr>
+            <a:r>
+              <a:rPr sz="910">
+                <a:solidFill>
+                  <a:srgbClr val="64748B"/>
+                </a:solidFill>
+                <a:latin typeface="Arial"/>
+              </a:rPr>
+              <a:t>(B, H, L, d/H)</a:t>
+            </a:r>
+          </a:p>
+        </p:txBody>
+      </p:sp>
+      <p:sp>
+        <p:nvSpPr>
+          <p:cNvPr id="20" name="Rounded Rectangle 19"/>
           <p:cNvSpPr/>
           <p:nvPr/>
         </p:nvSpPr>
         <p:spPr>
           <a:xfrm>
-            <a:off x="9062720" y="1016000"/>
-            <a:ext cx="894080" cy="487680"/>
+            <a:off x="7762240" y="2519680"/>
+            <a:ext cx="1625600" cy="650240"/>
+          </a:xfrm>
+          <a:prstGeom prst="roundRect">
+            <a:avLst>
+              <a:gd name="adj" fmla="val 6250"/>
+            </a:avLst>
+          </a:prstGeom>
+          <a:solidFill>
+            <a:srgbClr val="F8FAFC"/>
+          </a:solidFill>
+          <a:ln w="19050">
+            <a:solidFill>
+              <a:srgbClr val="1E3A5F"/>
+            </a:solidFill>
+          </a:ln>
+        </p:spPr>
+        <p:style>
+          <a:lnRef idx="1">
+            <a:schemeClr val="accent1"/>
+          </a:lnRef>
+          <a:fillRef idx="3">
+            <a:schemeClr val="accent1"/>
+          </a:fillRef>
+          <a:effectRef idx="2">
+            <a:schemeClr val="accent1"/>
+          </a:effectRef>
+          <a:fontRef idx="minor">
+            <a:schemeClr val="lt1"/>
+          </a:fontRef>
+        </p:style>
+        <p:txBody>
+          <a:bodyPr rtlCol="0" anchor="t" wrap="none" lIns="0" rIns="0" tIns="115951" bIns="0"/>
+          <a:lstStyle/>
+          <a:p>
+            <a:pPr algn="l" marL="92456">
+              <a:lnSpc>
+                <a:spcPts val="984"/>
+              </a:lnSpc>
+              <a:spcBef>
+                <a:spcPts val="0"/>
+              </a:spcBef>
+              <a:spcAft>
+                <a:spcPts val="0"/>
+              </a:spcAft>
+            </a:pPr>
+            <a:r>
+              <a:rPr sz="1025" b="1">
+                <a:solidFill>
+                  <a:srgbClr val="374151"/>
+                </a:solidFill>
+                <a:latin typeface="Arial"/>
+              </a:rPr>
+              <a:t>Scaled dot-product</a:t>
+            </a:r>
+          </a:p>
+          <a:p>
+            <a:pPr algn="l" marL="92456">
+              <a:lnSpc>
+                <a:spcPts val="873"/>
+              </a:lnSpc>
+              <a:spcBef>
+                <a:spcPts val="296"/>
+              </a:spcBef>
+              <a:spcAft>
+                <a:spcPts val="0"/>
+              </a:spcAft>
+            </a:pPr>
+            <a:r>
+              <a:rPr sz="910">
+                <a:solidFill>
+                  <a:srgbClr val="64748B"/>
+                </a:solidFill>
+                <a:latin typeface="Arial"/>
+              </a:rPr>
+              <a:t>causal mask, dropout 0.1</a:t>
+            </a:r>
+          </a:p>
+          <a:p>
+            <a:pPr algn="l" marL="92456">
+              <a:lnSpc>
+                <a:spcPts val="873"/>
+              </a:lnSpc>
+              <a:spcBef>
+                <a:spcPts val="486"/>
+              </a:spcBef>
+              <a:spcAft>
+                <a:spcPts val="0"/>
+              </a:spcAft>
+            </a:pPr>
+            <a:r>
+              <a:rPr sz="910">
+                <a:solidFill>
+                  <a:srgbClr val="64748B"/>
+                </a:solidFill>
+                <a:latin typeface="Arial"/>
+              </a:rPr>
+              <a:t>(B, H, L, L)</a:t>
+            </a:r>
+          </a:p>
+        </p:txBody>
+      </p:sp>
+      <p:sp>
+        <p:nvSpPr>
+          <p:cNvPr id="21" name="Rounded Rectangle 20"/>
+          <p:cNvSpPr/>
+          <p:nvPr/>
+        </p:nvSpPr>
+        <p:spPr>
+          <a:xfrm>
+            <a:off x="9550400" y="2600960"/>
+            <a:ext cx="1422400" cy="487680"/>
           </a:xfrm>
           <a:prstGeom prst="roundRect">
             <a:avLst>
@@ -4530,12 +5169,12 @@
           </a:fontRef>
         </p:style>
         <p:txBody>
-          <a:bodyPr rtlCol="0" anchor="t" wrap="none" lIns="0" rIns="0" tIns="104140" bIns="0"/>
+          <a:bodyPr rtlCol="0" anchor="t" wrap="none" lIns="0" rIns="0" tIns="115951" bIns="0"/>
           <a:lstStyle/>
           <a:p>
-            <a:pPr algn="l" marL="81280">
+            <a:pPr algn="l" marL="92456">
               <a:lnSpc>
-                <a:spcPts val="864"/>
+                <a:spcPts val="984"/>
               </a:lnSpc>
               <a:spcBef>
                 <a:spcPts val="0"/>
@@ -4545,83 +5184,59 @@
               </a:spcAft>
             </a:pPr>
             <a:r>
-              <a:rPr sz="900" b="1">
+              <a:rPr sz="1025" b="1">
                 <a:solidFill>
                   <a:srgbClr val="374151"/>
                 </a:solidFill>
                 <a:latin typeface="Arial"/>
               </a:rPr>
-              <a:t>Task head</a:t>
-            </a:r>
-          </a:p>
-          <a:p>
-            <a:pPr algn="l" marL="81280">
+              <a:t>Output projection</a:t>
+            </a:r>
+          </a:p>
+          <a:p>
+            <a:pPr algn="l" marL="92456">
               <a:lnSpc>
-                <a:spcPts val="768"/>
+                <a:spcPts val="873"/>
               </a:lnSpc>
               <a:spcBef>
-                <a:spcPts val="96"/>
+                <a:spcPts val="376"/>
               </a:spcBef>
               <a:spcAft>
                 <a:spcPts val="0"/>
               </a:spcAft>
             </a:pPr>
             <a:r>
-              <a:rPr sz="800">
+              <a:rPr sz="910">
                 <a:solidFill>
                   <a:srgbClr val="64748B"/>
                 </a:solidFill>
                 <a:latin typeface="Arial"/>
               </a:rPr>
-              <a:t>Linear d to C</a:t>
-            </a:r>
-          </a:p>
-          <a:p>
-            <a:pPr algn="l" marL="81280">
-              <a:lnSpc>
-                <a:spcPts val="768"/>
-              </a:lnSpc>
-              <a:spcBef>
-                <a:spcPts val="272"/>
-              </a:spcBef>
-              <a:spcAft>
-                <a:spcPts val="0"/>
-              </a:spcAft>
-            </a:pPr>
-            <a:r>
-              <a:rPr sz="800">
-                <a:solidFill>
-                  <a:srgbClr val="64748B"/>
-                </a:solidFill>
-                <a:latin typeface="Arial"/>
-              </a:rPr>
-              <a:t>(B, C)</a:t>
-            </a:r>
-          </a:p>
-        </p:txBody>
-      </p:sp>
-      <p:sp>
-        <p:nvSpPr>
-          <p:cNvPr id="15" name="Rounded Rectangle 14"/>
+              <a:t>(B, L, d)</a:t>
+            </a:r>
+          </a:p>
+        </p:txBody>
+      </p:sp>
+      <p:sp>
+        <p:nvSpPr>
+          <p:cNvPr id="22" name="Oval 21"/>
           <p:cNvSpPr/>
           <p:nvPr/>
         </p:nvSpPr>
         <p:spPr>
           <a:xfrm>
-            <a:off x="10078720" y="1016000"/>
-            <a:ext cx="1178560" cy="487680"/>
-          </a:xfrm>
-          <a:prstGeom prst="roundRect">
-            <a:avLst>
-              <a:gd name="adj" fmla="val 8333"/>
-            </a:avLst>
+            <a:off x="11135360" y="2641600"/>
+            <a:ext cx="365760" cy="365760"/>
+          </a:xfrm>
+          <a:prstGeom prst="ellipse">
+            <a:avLst/>
           </a:prstGeom>
           <a:solidFill>
             <a:srgbClr val="FFFFFF"/>
           </a:solidFill>
           <a:ln w="19050">
             <a:solidFill>
-              <a:srgbClr val="B45309"/>
+              <a:srgbClr val="475569"/>
             </a:solidFill>
           </a:ln>
         </p:spPr>
@@ -4640,12 +5255,12 @@
           </a:fontRef>
         </p:style>
         <p:txBody>
-          <a:bodyPr rtlCol="0" anchor="t" wrap="none" lIns="0" rIns="0" tIns="104140" bIns="0"/>
+          <a:bodyPr rtlCol="0" anchor="t" wrap="none" lIns="0" rIns="0" tIns="166751" bIns="0"/>
           <a:lstStyle/>
           <a:p>
-            <a:pPr algn="l" marL="81280">
+            <a:pPr algn="ctr">
               <a:lnSpc>
-                <a:spcPts val="864"/>
+                <a:spcPts val="984"/>
               </a:lnSpc>
               <a:spcBef>
                 <a:spcPts val="0"/>
@@ -4655,75 +5270,31 @@
               </a:spcAft>
             </a:pPr>
             <a:r>
-              <a:rPr sz="900" b="1">
-                <a:solidFill>
-                  <a:srgbClr val="374151"/>
+              <a:rPr sz="1025" b="1">
+                <a:solidFill>
+                  <a:srgbClr val="475569"/>
                 </a:solidFill>
                 <a:latin typeface="Arial"/>
               </a:rPr>
-              <a:t>Cross-entropy</a:t>
-            </a:r>
-          </a:p>
-          <a:p>
-            <a:pPr algn="l" marL="81280">
-              <a:lnSpc>
-                <a:spcPts val="768"/>
-              </a:lnSpc>
-              <a:spcBef>
-                <a:spcPts val="96"/>
-              </a:spcBef>
-              <a:spcAft>
-                <a:spcPts val="0"/>
-              </a:spcAft>
-            </a:pPr>
-            <a:r>
-              <a:rPr sz="800">
-                <a:solidFill>
-                  <a:srgbClr val="64748B"/>
-                </a:solidFill>
-                <a:latin typeface="Arial"/>
-              </a:rPr>
-              <a:t>label smoothing 0.1</a:t>
-            </a:r>
-          </a:p>
-          <a:p>
-            <a:pPr algn="l" marL="81280">
-              <a:lnSpc>
-                <a:spcPts val="768"/>
-              </a:lnSpc>
-              <a:spcBef>
-                <a:spcPts val="272"/>
-              </a:spcBef>
-              <a:spcAft>
-                <a:spcPts val="0"/>
-              </a:spcAft>
-            </a:pPr>
-            <a:r>
-              <a:rPr sz="800">
-                <a:solidFill>
-                  <a:srgbClr val="64748B"/>
-                </a:solidFill>
-                <a:latin typeface="Arial"/>
-              </a:rPr>
-              <a:t>scalar</a:t>
-            </a:r>
-          </a:p>
-        </p:txBody>
-      </p:sp>
-      <p:sp>
-        <p:nvSpPr>
-          <p:cNvPr id="16" name="Rounded Rectangle 15"/>
+              <a:t>+</a:t>
+            </a:r>
+          </a:p>
+        </p:txBody>
+      </p:sp>
+      <p:sp>
+        <p:nvSpPr>
+          <p:cNvPr id="23" name="Rounded Rectangle 22"/>
           <p:cNvSpPr/>
           <p:nvPr/>
         </p:nvSpPr>
         <p:spPr>
           <a:xfrm>
-            <a:off x="325120" y="1747520"/>
-            <a:ext cx="6055360" cy="1137920"/>
+            <a:off x="325120" y="3657600"/>
+            <a:ext cx="4958080" cy="1463040"/>
           </a:xfrm>
           <a:prstGeom prst="roundRect">
             <a:avLst>
-              <a:gd name="adj" fmla="val 3571"/>
+              <a:gd name="adj" fmla="val 2777"/>
             </a:avLst>
           </a:prstGeom>
           <a:noFill/>
@@ -4749,12 +5320,12 @@
           </a:fontRef>
         </p:style>
         <p:txBody>
-          <a:bodyPr rtlCol="0" anchor="t" wrap="none" lIns="0" rIns="0" tIns="91440" bIns="0"/>
+          <a:bodyPr rtlCol="0" anchor="t" wrap="none" lIns="0" rIns="0" tIns="83058" bIns="0"/>
           <a:lstStyle/>
           <a:p>
             <a:pPr algn="l" marL="81280">
               <a:lnSpc>
-                <a:spcPts val="768"/>
+                <a:spcPts val="873"/>
               </a:lnSpc>
               <a:spcBef>
                 <a:spcPts val="0"/>
@@ -4764,31 +5335,31 @@
               </a:spcAft>
             </a:pPr>
             <a:r>
-              <a:rPr sz="800" b="1">
+              <a:rPr sz="910" b="1">
                 <a:solidFill>
                   <a:srgbClr val="64748B"/>
                 </a:solidFill>
                 <a:latin typeface="Arial"/>
               </a:rPr>
-              <a:t>4. Self-attention sub-block  (pre-norm residual)</a:t>
-            </a:r>
-          </a:p>
-        </p:txBody>
-      </p:sp>
-      <p:sp>
-        <p:nvSpPr>
-          <p:cNvPr id="17" name="Rounded Rectangle 16"/>
+              <a:t>5. Feed-forward sub-block  (pre-norm residual)</a:t>
+            </a:r>
+          </a:p>
+        </p:txBody>
+      </p:sp>
+      <p:sp>
+        <p:nvSpPr>
+          <p:cNvPr id="24" name="Rounded Rectangle 23"/>
           <p:cNvSpPr/>
           <p:nvPr/>
         </p:nvSpPr>
         <p:spPr>
           <a:xfrm>
-            <a:off x="447040" y="2032000"/>
-            <a:ext cx="5811520" cy="731520"/>
+            <a:off x="487680" y="3982720"/>
+            <a:ext cx="4632960" cy="975360"/>
           </a:xfrm>
           <a:prstGeom prst="roundRect">
             <a:avLst>
-              <a:gd name="adj" fmla="val 5555"/>
+              <a:gd name="adj" fmla="val 4166"/>
             </a:avLst>
           </a:prstGeom>
           <a:noFill/>
@@ -4823,102 +5394,14 @@
       </p:sp>
       <p:sp>
         <p:nvSpPr>
-          <p:cNvPr id="18" name="Rounded Rectangle 17"/>
+          <p:cNvPr id="25" name="Rounded Rectangle 24"/>
           <p:cNvSpPr/>
           <p:nvPr/>
         </p:nvSpPr>
         <p:spPr>
           <a:xfrm>
-            <a:off x="568960" y="2194560"/>
-            <a:ext cx="894080" cy="365760"/>
-          </a:xfrm>
-          <a:prstGeom prst="roundRect">
-            <a:avLst>
-              <a:gd name="adj" fmla="val 11111"/>
-            </a:avLst>
-          </a:prstGeom>
-          <a:solidFill>
-            <a:srgbClr val="F8FAFC"/>
-          </a:solidFill>
-          <a:ln w="19050">
-            <a:solidFill>
-              <a:srgbClr val="475569"/>
-            </a:solidFill>
-          </a:ln>
-        </p:spPr>
-        <p:style>
-          <a:lnRef idx="1">
-            <a:schemeClr val="accent1"/>
-          </a:lnRef>
-          <a:fillRef idx="3">
-            <a:schemeClr val="accent1"/>
-          </a:fillRef>
-          <a:effectRef idx="2">
-            <a:schemeClr val="accent1"/>
-          </a:effectRef>
-          <a:fontRef idx="minor">
-            <a:schemeClr val="lt1"/>
-          </a:fontRef>
-        </p:style>
-        <p:txBody>
-          <a:bodyPr rtlCol="0" anchor="t" wrap="none" lIns="0" rIns="0" tIns="104140" bIns="0"/>
-          <a:lstStyle/>
-          <a:p>
-            <a:pPr algn="l" marL="81280">
-              <a:lnSpc>
-                <a:spcPts val="864"/>
-              </a:lnSpc>
-              <a:spcBef>
-                <a:spcPts val="0"/>
-              </a:spcBef>
-              <a:spcAft>
-                <a:spcPts val="0"/>
-              </a:spcAft>
-            </a:pPr>
-            <a:r>
-              <a:rPr sz="900" b="1">
-                <a:solidFill>
-                  <a:srgbClr val="374151"/>
-                </a:solidFill>
-                <a:latin typeface="Arial"/>
-              </a:rPr>
-              <a:t>LayerNorm</a:t>
-            </a:r>
-          </a:p>
-          <a:p>
-            <a:pPr algn="l" marL="81280">
-              <a:lnSpc>
-                <a:spcPts val="768"/>
-              </a:lnSpc>
-              <a:spcBef>
-                <a:spcPts val="176"/>
-              </a:spcBef>
-              <a:spcAft>
-                <a:spcPts val="0"/>
-              </a:spcAft>
-            </a:pPr>
-            <a:r>
-              <a:rPr sz="800">
-                <a:solidFill>
-                  <a:srgbClr val="64748B"/>
-                </a:solidFill>
-                <a:latin typeface="Arial"/>
-              </a:rPr>
-              <a:t>(B, L, d)</a:t>
-            </a:r>
-          </a:p>
-        </p:txBody>
-      </p:sp>
-      <p:sp>
-        <p:nvSpPr>
-          <p:cNvPr id="19" name="Rounded Rectangle 18"/>
-          <p:cNvSpPr/>
-          <p:nvPr/>
-        </p:nvSpPr>
-        <p:spPr>
-          <a:xfrm>
-            <a:off x="1584960" y="2153920"/>
-            <a:ext cx="1137920" cy="487680"/>
+            <a:off x="650240" y="4226560"/>
+            <a:ext cx="975360" cy="487680"/>
           </a:xfrm>
           <a:prstGeom prst="roundRect">
             <a:avLst>
@@ -4949,12 +5432,12 @@
           </a:fontRef>
         </p:style>
         <p:txBody>
-          <a:bodyPr rtlCol="0" anchor="t" wrap="none" lIns="0" rIns="0" tIns="104140" bIns="0"/>
+          <a:bodyPr rtlCol="0" anchor="t" wrap="none" lIns="0" rIns="0" tIns="115951" bIns="0"/>
           <a:lstStyle/>
           <a:p>
-            <a:pPr algn="l" marL="81280">
+            <a:pPr algn="l" marL="92456">
               <a:lnSpc>
-                <a:spcPts val="864"/>
+                <a:spcPts val="984"/>
               </a:lnSpc>
               <a:spcBef>
                 <a:spcPts val="0"/>
@@ -4964,185 +5447,53 @@
               </a:spcAft>
             </a:pPr>
             <a:r>
-              <a:rPr sz="900" b="1">
+              <a:rPr sz="1025" b="1">
                 <a:solidFill>
                   <a:srgbClr val="374151"/>
                 </a:solidFill>
                 <a:latin typeface="Arial"/>
               </a:rPr>
-              <a:t>QKV projection</a:t>
-            </a:r>
-          </a:p>
-          <a:p>
-            <a:pPr algn="l" marL="81280">
+              <a:t>LayerNorm</a:t>
+            </a:r>
+          </a:p>
+          <a:p>
+            <a:pPr algn="l" marL="92456">
               <a:lnSpc>
-                <a:spcPts val="768"/>
+                <a:spcPts val="873"/>
               </a:lnSpc>
               <a:spcBef>
-                <a:spcPts val="96"/>
+                <a:spcPts val="376"/>
               </a:spcBef>
               <a:spcAft>
                 <a:spcPts val="0"/>
               </a:spcAft>
             </a:pPr>
             <a:r>
-              <a:rPr sz="800">
+              <a:rPr sz="910">
                 <a:solidFill>
                   <a:srgbClr val="64748B"/>
                 </a:solidFill>
                 <a:latin typeface="Arial"/>
               </a:rPr>
-              <a:t>3 x Linear d to d</a:t>
-            </a:r>
-          </a:p>
-          <a:p>
-            <a:pPr algn="l" marL="81280">
-              <a:lnSpc>
-                <a:spcPts val="768"/>
-              </a:lnSpc>
-              <a:spcBef>
-                <a:spcPts val="272"/>
-              </a:spcBef>
-              <a:spcAft>
-                <a:spcPts val="0"/>
-              </a:spcAft>
-            </a:pPr>
-            <a:r>
-              <a:rPr sz="800">
-                <a:solidFill>
-                  <a:srgbClr val="64748B"/>
-                </a:solidFill>
-                <a:latin typeface="Arial"/>
-              </a:rPr>
-              <a:t>(B, H, L, d/H)</a:t>
-            </a:r>
-          </a:p>
-        </p:txBody>
-      </p:sp>
-      <p:sp>
-        <p:nvSpPr>
-          <p:cNvPr id="20" name="Rounded Rectangle 19"/>
+              <a:t>(B, L, d)</a:t>
+            </a:r>
+          </a:p>
+        </p:txBody>
+      </p:sp>
+      <p:sp>
+        <p:nvSpPr>
+          <p:cNvPr id="26" name="Rounded Rectangle 25"/>
           <p:cNvSpPr/>
           <p:nvPr/>
         </p:nvSpPr>
         <p:spPr>
           <a:xfrm>
-            <a:off x="2844800" y="2153920"/>
-            <a:ext cx="1463040" cy="487680"/>
+            <a:off x="1788160" y="4145280"/>
+            <a:ext cx="1300480" cy="650240"/>
           </a:xfrm>
           <a:prstGeom prst="roundRect">
             <a:avLst>
-              <a:gd name="adj" fmla="val 8333"/>
-            </a:avLst>
-          </a:prstGeom>
-          <a:solidFill>
-            <a:srgbClr val="F8FAFC"/>
-          </a:solidFill>
-          <a:ln w="19050">
-            <a:solidFill>
-              <a:srgbClr val="1E3A5F"/>
-            </a:solidFill>
-          </a:ln>
-        </p:spPr>
-        <p:style>
-          <a:lnRef idx="1">
-            <a:schemeClr val="accent1"/>
-          </a:lnRef>
-          <a:fillRef idx="3">
-            <a:schemeClr val="accent1"/>
-          </a:fillRef>
-          <a:effectRef idx="2">
-            <a:schemeClr val="accent1"/>
-          </a:effectRef>
-          <a:fontRef idx="minor">
-            <a:schemeClr val="lt1"/>
-          </a:fontRef>
-        </p:style>
-        <p:txBody>
-          <a:bodyPr rtlCol="0" anchor="t" wrap="none" lIns="0" rIns="0" tIns="104140" bIns="0"/>
-          <a:lstStyle/>
-          <a:p>
-            <a:pPr algn="l" marL="81280">
-              <a:lnSpc>
-                <a:spcPts val="864"/>
-              </a:lnSpc>
-              <a:spcBef>
-                <a:spcPts val="0"/>
-              </a:spcBef>
-              <a:spcAft>
-                <a:spcPts val="0"/>
-              </a:spcAft>
-            </a:pPr>
-            <a:r>
-              <a:rPr sz="900" b="1">
-                <a:solidFill>
-                  <a:srgbClr val="374151"/>
-                </a:solidFill>
-                <a:latin typeface="Arial"/>
-              </a:rPr>
-              <a:t>Scaled dot-product</a:t>
-            </a:r>
-          </a:p>
-          <a:p>
-            <a:pPr algn="l" marL="81280">
-              <a:lnSpc>
-                <a:spcPts val="768"/>
-              </a:lnSpc>
-              <a:spcBef>
-                <a:spcPts val="96"/>
-              </a:spcBef>
-              <a:spcAft>
-                <a:spcPts val="0"/>
-              </a:spcAft>
-            </a:pPr>
-            <a:r>
-              <a:rPr sz="800">
-                <a:solidFill>
-                  <a:srgbClr val="64748B"/>
-                </a:solidFill>
-                <a:latin typeface="Arial"/>
-              </a:rPr>
-              <a:t>causal mask, dropout 0.1</a:t>
-            </a:r>
-          </a:p>
-          <a:p>
-            <a:pPr algn="l" marL="81280">
-              <a:lnSpc>
-                <a:spcPts val="768"/>
-              </a:lnSpc>
-              <a:spcBef>
-                <a:spcPts val="272"/>
-              </a:spcBef>
-              <a:spcAft>
-                <a:spcPts val="0"/>
-              </a:spcAft>
-            </a:pPr>
-            <a:r>
-              <a:rPr sz="800">
-                <a:solidFill>
-                  <a:srgbClr val="64748B"/>
-                </a:solidFill>
-                <a:latin typeface="Arial"/>
-              </a:rPr>
-              <a:t>(B, H, L, L)</a:t>
-            </a:r>
-          </a:p>
-        </p:txBody>
-      </p:sp>
-      <p:sp>
-        <p:nvSpPr>
-          <p:cNvPr id="21" name="Rounded Rectangle 20"/>
-          <p:cNvSpPr/>
-          <p:nvPr/>
-        </p:nvSpPr>
-        <p:spPr>
-          <a:xfrm>
-            <a:off x="4429760" y="2194560"/>
-            <a:ext cx="1259840" cy="365760"/>
-          </a:xfrm>
-          <a:prstGeom prst="roundRect">
-            <a:avLst>
-              <a:gd name="adj" fmla="val 11111"/>
+              <a:gd name="adj" fmla="val 6250"/>
             </a:avLst>
           </a:prstGeom>
           <a:solidFill>
@@ -5169,12 +5520,12 @@
           </a:fontRef>
         </p:style>
         <p:txBody>
-          <a:bodyPr rtlCol="0" anchor="t" wrap="none" lIns="0" rIns="0" tIns="104140" bIns="0"/>
+          <a:bodyPr rtlCol="0" anchor="t" wrap="none" lIns="0" rIns="0" tIns="115951" bIns="0"/>
           <a:lstStyle/>
           <a:p>
-            <a:pPr algn="l" marL="81280">
+            <a:pPr algn="l" marL="92456">
               <a:lnSpc>
-                <a:spcPts val="864"/>
+                <a:spcPts val="984"/>
               </a:lnSpc>
               <a:spcBef>
                 <a:spcPts val="0"/>
@@ -5184,312 +5535,71 @@
               </a:spcAft>
             </a:pPr>
             <a:r>
-              <a:rPr sz="900" b="1">
+              <a:rPr sz="1025" b="1">
                 <a:solidFill>
                   <a:srgbClr val="374151"/>
                 </a:solidFill>
                 <a:latin typeface="Arial"/>
               </a:rPr>
-              <a:t>Output projection</a:t>
-            </a:r>
-          </a:p>
-          <a:p>
-            <a:pPr algn="l" marL="81280">
+              <a:t>Linear d to 4d</a:t>
+            </a:r>
+          </a:p>
+          <a:p>
+            <a:pPr algn="l" marL="92456">
               <a:lnSpc>
-                <a:spcPts val="768"/>
+                <a:spcPts val="873"/>
               </a:lnSpc>
               <a:spcBef>
-                <a:spcPts val="176"/>
+                <a:spcPts val="296"/>
               </a:spcBef>
               <a:spcAft>
                 <a:spcPts val="0"/>
               </a:spcAft>
             </a:pPr>
             <a:r>
-              <a:rPr sz="800">
+              <a:rPr sz="910">
                 <a:solidFill>
                   <a:srgbClr val="64748B"/>
                 </a:solidFill>
                 <a:latin typeface="Arial"/>
               </a:rPr>
-              <a:t>(B, L, d)</a:t>
-            </a:r>
-          </a:p>
-        </p:txBody>
-      </p:sp>
-      <p:sp>
-        <p:nvSpPr>
-          <p:cNvPr id="22" name="Oval 21"/>
+              <a:t>GELU, dropout 0.1</a:t>
+            </a:r>
+          </a:p>
+          <a:p>
+            <a:pPr algn="l" marL="92456">
+              <a:lnSpc>
+                <a:spcPts val="873"/>
+              </a:lnSpc>
+              <a:spcBef>
+                <a:spcPts val="486"/>
+              </a:spcBef>
+              <a:spcAft>
+                <a:spcPts val="0"/>
+              </a:spcAft>
+            </a:pPr>
+            <a:r>
+              <a:rPr sz="910">
+                <a:solidFill>
+                  <a:srgbClr val="64748B"/>
+                </a:solidFill>
+                <a:latin typeface="Arial"/>
+              </a:rPr>
+              <a:t>(B, L, 4d)</a:t>
+            </a:r>
+          </a:p>
+        </p:txBody>
+      </p:sp>
+      <p:sp>
+        <p:nvSpPr>
+          <p:cNvPr id="27" name="Rounded Rectangle 26"/>
           <p:cNvSpPr/>
           <p:nvPr/>
         </p:nvSpPr>
         <p:spPr>
           <a:xfrm>
-            <a:off x="5811520" y="2235200"/>
-            <a:ext cx="325120" cy="325120"/>
-          </a:xfrm>
-          <a:prstGeom prst="ellipse">
-            <a:avLst/>
-          </a:prstGeom>
-          <a:solidFill>
-            <a:srgbClr val="FFFFFF"/>
-          </a:solidFill>
-          <a:ln w="19050">
-            <a:solidFill>
-              <a:srgbClr val="475569"/>
-            </a:solidFill>
-          </a:ln>
-        </p:spPr>
-        <p:style>
-          <a:lnRef idx="1">
-            <a:schemeClr val="accent1"/>
-          </a:lnRef>
-          <a:fillRef idx="3">
-            <a:schemeClr val="accent1"/>
-          </a:fillRef>
-          <a:effectRef idx="2">
-            <a:schemeClr val="accent1"/>
-          </a:effectRef>
-          <a:fontRef idx="minor">
-            <a:schemeClr val="lt1"/>
-          </a:fontRef>
-        </p:style>
-        <p:txBody>
-          <a:bodyPr rtlCol="0" anchor="t" wrap="none" lIns="0" rIns="0" tIns="149860" bIns="0"/>
-          <a:lstStyle/>
-          <a:p>
-            <a:pPr algn="ctr">
-              <a:lnSpc>
-                <a:spcPts val="864"/>
-              </a:lnSpc>
-              <a:spcBef>
-                <a:spcPts val="0"/>
-              </a:spcBef>
-              <a:spcAft>
-                <a:spcPts val="0"/>
-              </a:spcAft>
-            </a:pPr>
-            <a:r>
-              <a:rPr sz="900" b="1">
-                <a:solidFill>
-                  <a:srgbClr val="475569"/>
-                </a:solidFill>
-                <a:latin typeface="Arial"/>
-              </a:rPr>
-              <a:t>+</a:t>
-            </a:r>
-          </a:p>
-        </p:txBody>
-      </p:sp>
-      <p:sp>
-        <p:nvSpPr>
-          <p:cNvPr id="23" name="Rounded Rectangle 22"/>
-          <p:cNvSpPr/>
-          <p:nvPr/>
-        </p:nvSpPr>
-        <p:spPr>
-          <a:xfrm>
-            <a:off x="6502400" y="1747520"/>
-            <a:ext cx="4267200" cy="1137920"/>
-          </a:xfrm>
-          <a:prstGeom prst="roundRect">
-            <a:avLst>
-              <a:gd name="adj" fmla="val 3571"/>
-            </a:avLst>
-          </a:prstGeom>
-          <a:noFill/>
-          <a:ln w="19050">
-            <a:solidFill>
-              <a:srgbClr val="E2E8F0"/>
-            </a:solidFill>
-            <a:prstDash val="dash"/>
-          </a:ln>
-        </p:spPr>
-        <p:style>
-          <a:lnRef idx="1">
-            <a:schemeClr val="accent1"/>
-          </a:lnRef>
-          <a:fillRef idx="3">
-            <a:schemeClr val="accent1"/>
-          </a:fillRef>
-          <a:effectRef idx="2">
-            <a:schemeClr val="accent1"/>
-          </a:effectRef>
-          <a:fontRef idx="minor">
-            <a:schemeClr val="lt1"/>
-          </a:fontRef>
-        </p:style>
-        <p:txBody>
-          <a:bodyPr rtlCol="0" anchor="t" wrap="none" lIns="0" rIns="0" tIns="91440" bIns="0"/>
-          <a:lstStyle/>
-          <a:p>
-            <a:pPr algn="l" marL="81280">
-              <a:lnSpc>
-                <a:spcPts val="768"/>
-              </a:lnSpc>
-              <a:spcBef>
-                <a:spcPts val="0"/>
-              </a:spcBef>
-              <a:spcAft>
-                <a:spcPts val="0"/>
-              </a:spcAft>
-            </a:pPr>
-            <a:r>
-              <a:rPr sz="800" b="1">
-                <a:solidFill>
-                  <a:srgbClr val="64748B"/>
-                </a:solidFill>
-                <a:latin typeface="Arial"/>
-              </a:rPr>
-              <a:t>5. Feed-forward sub-block  (pre-norm residual)</a:t>
-            </a:r>
-          </a:p>
-        </p:txBody>
-      </p:sp>
-      <p:sp>
-        <p:nvSpPr>
-          <p:cNvPr id="24" name="Rounded Rectangle 23"/>
-          <p:cNvSpPr/>
-          <p:nvPr/>
-        </p:nvSpPr>
-        <p:spPr>
-          <a:xfrm>
-            <a:off x="6624320" y="2032000"/>
-            <a:ext cx="4023360" cy="731520"/>
-          </a:xfrm>
-          <a:prstGeom prst="roundRect">
-            <a:avLst>
-              <a:gd name="adj" fmla="val 5555"/>
-            </a:avLst>
-          </a:prstGeom>
-          <a:noFill/>
-          <a:ln w="19050">
-            <a:solidFill>
-              <a:srgbClr val="64748B"/>
-            </a:solidFill>
-            <a:prstDash val="dash"/>
-          </a:ln>
-        </p:spPr>
-        <p:style>
-          <a:lnRef idx="1">
-            <a:schemeClr val="accent1"/>
-          </a:lnRef>
-          <a:fillRef idx="3">
-            <a:schemeClr val="accent1"/>
-          </a:fillRef>
-          <a:effectRef idx="2">
-            <a:schemeClr val="accent1"/>
-          </a:effectRef>
-          <a:fontRef idx="minor">
-            <a:schemeClr val="lt1"/>
-          </a:fontRef>
-        </p:style>
-        <p:txBody>
-          <a:bodyPr rtlCol="0" anchor="ctr"/>
-          <a:lstStyle/>
-          <a:p>
-            <a:pPr algn="ctr"/>
-          </a:p>
-        </p:txBody>
-      </p:sp>
-      <p:sp>
-        <p:nvSpPr>
-          <p:cNvPr id="25" name="Rounded Rectangle 24"/>
-          <p:cNvSpPr/>
-          <p:nvPr/>
-        </p:nvSpPr>
-        <p:spPr>
-          <a:xfrm>
-            <a:off x="6746240" y="2194560"/>
-            <a:ext cx="894080" cy="365760"/>
-          </a:xfrm>
-          <a:prstGeom prst="roundRect">
-            <a:avLst>
-              <a:gd name="adj" fmla="val 11111"/>
-            </a:avLst>
-          </a:prstGeom>
-          <a:solidFill>
-            <a:srgbClr val="F8FAFC"/>
-          </a:solidFill>
-          <a:ln w="19050">
-            <a:solidFill>
-              <a:srgbClr val="475569"/>
-            </a:solidFill>
-          </a:ln>
-        </p:spPr>
-        <p:style>
-          <a:lnRef idx="1">
-            <a:schemeClr val="accent1"/>
-          </a:lnRef>
-          <a:fillRef idx="3">
-            <a:schemeClr val="accent1"/>
-          </a:fillRef>
-          <a:effectRef idx="2">
-            <a:schemeClr val="accent1"/>
-          </a:effectRef>
-          <a:fontRef idx="minor">
-            <a:schemeClr val="lt1"/>
-          </a:fontRef>
-        </p:style>
-        <p:txBody>
-          <a:bodyPr rtlCol="0" anchor="t" wrap="none" lIns="0" rIns="0" tIns="104140" bIns="0"/>
-          <a:lstStyle/>
-          <a:p>
-            <a:pPr algn="l" marL="81280">
-              <a:lnSpc>
-                <a:spcPts val="864"/>
-              </a:lnSpc>
-              <a:spcBef>
-                <a:spcPts val="0"/>
-              </a:spcBef>
-              <a:spcAft>
-                <a:spcPts val="0"/>
-              </a:spcAft>
-            </a:pPr>
-            <a:r>
-              <a:rPr sz="900" b="1">
-                <a:solidFill>
-                  <a:srgbClr val="374151"/>
-                </a:solidFill>
-                <a:latin typeface="Arial"/>
-              </a:rPr>
-              <a:t>LayerNorm</a:t>
-            </a:r>
-          </a:p>
-          <a:p>
-            <a:pPr algn="l" marL="81280">
-              <a:lnSpc>
-                <a:spcPts val="768"/>
-              </a:lnSpc>
-              <a:spcBef>
-                <a:spcPts val="176"/>
-              </a:spcBef>
-              <a:spcAft>
-                <a:spcPts val="0"/>
-              </a:spcAft>
-            </a:pPr>
-            <a:r>
-              <a:rPr sz="800">
-                <a:solidFill>
-                  <a:srgbClr val="64748B"/>
-                </a:solidFill>
-                <a:latin typeface="Arial"/>
-              </a:rPr>
-              <a:t>(B, L, d)</a:t>
-            </a:r>
-          </a:p>
-        </p:txBody>
-      </p:sp>
-      <p:sp>
-        <p:nvSpPr>
-          <p:cNvPr id="26" name="Rounded Rectangle 25"/>
-          <p:cNvSpPr/>
-          <p:nvPr/>
-        </p:nvSpPr>
-        <p:spPr>
-          <a:xfrm>
-            <a:off x="7762240" y="2153920"/>
-            <a:ext cx="1137920" cy="487680"/>
+            <a:off x="3251200" y="4226560"/>
+            <a:ext cx="1178560" cy="487680"/>
           </a:xfrm>
           <a:prstGeom prst="roundRect">
             <a:avLst>
@@ -5520,12 +5630,12 @@
           </a:fontRef>
         </p:style>
         <p:txBody>
-          <a:bodyPr rtlCol="0" anchor="t" wrap="none" lIns="0" rIns="0" tIns="104140" bIns="0"/>
+          <a:bodyPr rtlCol="0" anchor="t" wrap="none" lIns="0" rIns="0" tIns="115951" bIns="0"/>
           <a:lstStyle/>
           <a:p>
-            <a:pPr algn="l" marL="81280">
+            <a:pPr algn="l" marL="92456">
               <a:lnSpc>
-                <a:spcPts val="864"/>
+                <a:spcPts val="984"/>
               </a:lnSpc>
               <a:spcBef>
                 <a:spcPts val="0"/>
@@ -5535,117 +5645,7 @@
               </a:spcAft>
             </a:pPr>
             <a:r>
-              <a:rPr sz="900" b="1">
-                <a:solidFill>
-                  <a:srgbClr val="374151"/>
-                </a:solidFill>
-                <a:latin typeface="Arial"/>
-              </a:rPr>
-              <a:t>Linear d to 4d</a:t>
-            </a:r>
-          </a:p>
-          <a:p>
-            <a:pPr algn="l" marL="81280">
-              <a:lnSpc>
-                <a:spcPts val="768"/>
-              </a:lnSpc>
-              <a:spcBef>
-                <a:spcPts val="96"/>
-              </a:spcBef>
-              <a:spcAft>
-                <a:spcPts val="0"/>
-              </a:spcAft>
-            </a:pPr>
-            <a:r>
-              <a:rPr sz="800">
-                <a:solidFill>
-                  <a:srgbClr val="64748B"/>
-                </a:solidFill>
-                <a:latin typeface="Arial"/>
-              </a:rPr>
-              <a:t>GELU, dropout 0.1</a:t>
-            </a:r>
-          </a:p>
-          <a:p>
-            <a:pPr algn="l" marL="81280">
-              <a:lnSpc>
-                <a:spcPts val="768"/>
-              </a:lnSpc>
-              <a:spcBef>
-                <a:spcPts val="272"/>
-              </a:spcBef>
-              <a:spcAft>
-                <a:spcPts val="0"/>
-              </a:spcAft>
-            </a:pPr>
-            <a:r>
-              <a:rPr sz="800">
-                <a:solidFill>
-                  <a:srgbClr val="64748B"/>
-                </a:solidFill>
-                <a:latin typeface="Arial"/>
-              </a:rPr>
-              <a:t>(B, L, 4d)</a:t>
-            </a:r>
-          </a:p>
-        </p:txBody>
-      </p:sp>
-      <p:sp>
-        <p:nvSpPr>
-          <p:cNvPr id="27" name="Rounded Rectangle 26"/>
-          <p:cNvSpPr/>
-          <p:nvPr/>
-        </p:nvSpPr>
-        <p:spPr>
-          <a:xfrm>
-            <a:off x="9022080" y="2194560"/>
-            <a:ext cx="1056640" cy="365760"/>
-          </a:xfrm>
-          <a:prstGeom prst="roundRect">
-            <a:avLst>
-              <a:gd name="adj" fmla="val 11111"/>
-            </a:avLst>
-          </a:prstGeom>
-          <a:solidFill>
-            <a:srgbClr val="F8FAFC"/>
-          </a:solidFill>
-          <a:ln w="19050">
-            <a:solidFill>
-              <a:srgbClr val="475569"/>
-            </a:solidFill>
-          </a:ln>
-        </p:spPr>
-        <p:style>
-          <a:lnRef idx="1">
-            <a:schemeClr val="accent1"/>
-          </a:lnRef>
-          <a:fillRef idx="3">
-            <a:schemeClr val="accent1"/>
-          </a:fillRef>
-          <a:effectRef idx="2">
-            <a:schemeClr val="accent1"/>
-          </a:effectRef>
-          <a:fontRef idx="minor">
-            <a:schemeClr val="lt1"/>
-          </a:fontRef>
-        </p:style>
-        <p:txBody>
-          <a:bodyPr rtlCol="0" anchor="t" wrap="none" lIns="0" rIns="0" tIns="104140" bIns="0"/>
-          <a:lstStyle/>
-          <a:p>
-            <a:pPr algn="l" marL="81280">
-              <a:lnSpc>
-                <a:spcPts val="864"/>
-              </a:lnSpc>
-              <a:spcBef>
-                <a:spcPts val="0"/>
-              </a:spcBef>
-              <a:spcAft>
-                <a:spcPts val="0"/>
-              </a:spcAft>
-            </a:pPr>
-            <a:r>
-              <a:rPr sz="900" b="1">
+              <a:rPr sz="1025" b="1">
                 <a:solidFill>
                   <a:srgbClr val="374151"/>
                 </a:solidFill>
@@ -5655,19 +5655,19 @@
             </a:r>
           </a:p>
           <a:p>
-            <a:pPr algn="l" marL="81280">
+            <a:pPr algn="l" marL="92456">
               <a:lnSpc>
-                <a:spcPts val="768"/>
+                <a:spcPts val="873"/>
               </a:lnSpc>
               <a:spcBef>
-                <a:spcPts val="176"/>
+                <a:spcPts val="376"/>
               </a:spcBef>
               <a:spcAft>
                 <a:spcPts val="0"/>
               </a:spcAft>
             </a:pPr>
             <a:r>
-              <a:rPr sz="800">
+              <a:rPr sz="910">
                 <a:solidFill>
                   <a:srgbClr val="64748B"/>
                 </a:solidFill>
@@ -5686,8 +5686,8 @@
         </p:nvSpPr>
         <p:spPr>
           <a:xfrm>
-            <a:off x="10200640" y="2235200"/>
-            <a:ext cx="325120" cy="325120"/>
+            <a:off x="4592320" y="4267200"/>
+            <a:ext cx="365760" cy="365760"/>
           </a:xfrm>
           <a:prstGeom prst="ellipse">
             <a:avLst/>
@@ -5716,12 +5716,12 @@
           </a:fontRef>
         </p:style>
         <p:txBody>
-          <a:bodyPr rtlCol="0" anchor="t" wrap="none" lIns="0" rIns="0" tIns="149860" bIns="0"/>
+          <a:bodyPr rtlCol="0" anchor="t" wrap="none" lIns="0" rIns="0" tIns="166751" bIns="0"/>
           <a:lstStyle/>
           <a:p>
             <a:pPr algn="ctr">
               <a:lnSpc>
-                <a:spcPts val="864"/>
+                <a:spcPts val="984"/>
               </a:lnSpc>
               <a:spcBef>
                 <a:spcPts val="0"/>
@@ -5731,7 +5731,7 @@
               </a:spcAft>
             </a:pPr>
             <a:r>
-              <a:rPr sz="900" b="1">
+              <a:rPr sz="1025" b="1">
                 <a:solidFill>
                   <a:srgbClr val="475569"/>
                 </a:solidFill>
@@ -5750,12 +5750,12 @@
         </p:nvSpPr>
         <p:spPr>
           <a:xfrm>
-            <a:off x="325120" y="3007360"/>
-            <a:ext cx="5039360" cy="894080"/>
+            <a:off x="5445760" y="3657600"/>
+            <a:ext cx="5689600" cy="1137920"/>
           </a:xfrm>
           <a:prstGeom prst="roundRect">
             <a:avLst>
-              <a:gd name="adj" fmla="val 4545"/>
+              <a:gd name="adj" fmla="val 3571"/>
             </a:avLst>
           </a:prstGeom>
           <a:noFill/>
@@ -5781,12 +5781,12 @@
           </a:fontRef>
         </p:style>
         <p:txBody>
-          <a:bodyPr rtlCol="0" anchor="t" wrap="none" lIns="0" rIns="0" tIns="91440" bIns="0"/>
+          <a:bodyPr rtlCol="0" anchor="t" wrap="none" lIns="0" rIns="0" tIns="83058" bIns="0"/>
           <a:lstStyle/>
           <a:p>
             <a:pPr algn="l" marL="81280">
               <a:lnSpc>
-                <a:spcPts val="768"/>
+                <a:spcPts val="873"/>
               </a:lnSpc>
               <a:spcBef>
                 <a:spcPts val="0"/>
@@ -5796,7 +5796,7 @@
               </a:spcAft>
             </a:pPr>
             <a:r>
-              <a:rPr sz="800" b="1">
+              <a:rPr sz="910" b="1">
                 <a:solidFill>
                   <a:srgbClr val="64748B"/>
                 </a:solidFill>
@@ -5815,12 +5815,12 @@
         </p:nvSpPr>
         <p:spPr>
           <a:xfrm>
-            <a:off x="447040" y="3291840"/>
-            <a:ext cx="1056640" cy="487680"/>
+            <a:off x="5608320" y="3982720"/>
+            <a:ext cx="1137920" cy="650240"/>
           </a:xfrm>
           <a:prstGeom prst="roundRect">
             <a:avLst>
-              <a:gd name="adj" fmla="val 8333"/>
+              <a:gd name="adj" fmla="val 6250"/>
             </a:avLst>
           </a:prstGeom>
           <a:solidFill>
@@ -5847,12 +5847,12 @@
           </a:fontRef>
         </p:style>
         <p:txBody>
-          <a:bodyPr rtlCol="0" anchor="t" wrap="none" lIns="0" rIns="0" tIns="104140" bIns="0"/>
+          <a:bodyPr rtlCol="0" anchor="t" wrap="none" lIns="0" rIns="0" tIns="115951" bIns="0"/>
           <a:lstStyle/>
           <a:p>
-            <a:pPr algn="l" marL="81280">
+            <a:pPr algn="l" marL="92456">
               <a:lnSpc>
-                <a:spcPts val="864"/>
+                <a:spcPts val="984"/>
               </a:lnSpc>
               <a:spcBef>
                 <a:spcPts val="0"/>
@@ -5862,7 +5862,7 @@
               </a:spcAft>
             </a:pPr>
             <a:r>
-              <a:rPr sz="900" b="1">
+              <a:rPr sz="1025" b="1">
                 <a:solidFill>
                   <a:srgbClr val="374151"/>
                 </a:solidFill>
@@ -5872,19 +5872,19 @@
             </a:r>
           </a:p>
           <a:p>
-            <a:pPr algn="l" marL="81280">
+            <a:pPr algn="l" marL="92456">
               <a:lnSpc>
-                <a:spcPts val="768"/>
+                <a:spcPts val="873"/>
               </a:lnSpc>
               <a:spcBef>
-                <a:spcPts val="96"/>
+                <a:spcPts val="296"/>
               </a:spcBef>
               <a:spcAft>
                 <a:spcPts val="0"/>
               </a:spcAft>
             </a:pPr>
             <a:r>
-              <a:rPr sz="800">
+              <a:rPr sz="910">
                 <a:solidFill>
                   <a:srgbClr val="64748B"/>
                 </a:solidFill>
@@ -5894,19 +5894,19 @@
             </a:r>
           </a:p>
           <a:p>
-            <a:pPr algn="l" marL="81280">
+            <a:pPr algn="l" marL="92456">
               <a:lnSpc>
-                <a:spcPts val="768"/>
+                <a:spcPts val="873"/>
               </a:lnSpc>
               <a:spcBef>
-                <a:spcPts val="272"/>
+                <a:spcPts val="486"/>
               </a:spcBef>
               <a:spcAft>
                 <a:spcPts val="0"/>
               </a:spcAft>
             </a:pPr>
             <a:r>
-              <a:rPr sz="800">
+              <a:rPr sz="910">
                 <a:solidFill>
                   <a:srgbClr val="64748B"/>
                 </a:solidFill>
@@ -5925,8 +5925,733 @@
         </p:nvSpPr>
         <p:spPr>
           <a:xfrm>
-            <a:off x="1625600" y="3291840"/>
-            <a:ext cx="853440" cy="487680"/>
+            <a:off x="6908800" y="3982720"/>
+            <a:ext cx="934720" cy="650240"/>
+          </a:xfrm>
+          <a:prstGeom prst="roundRect">
+            <a:avLst>
+              <a:gd name="adj" fmla="val 6250"/>
+            </a:avLst>
+          </a:prstGeom>
+          <a:solidFill>
+            <a:srgbClr val="FFFFFF"/>
+          </a:solidFill>
+          <a:ln w="19050">
+            <a:solidFill>
+              <a:srgbClr val="B45309"/>
+            </a:solidFill>
+          </a:ln>
+        </p:spPr>
+        <p:style>
+          <a:lnRef idx="1">
+            <a:schemeClr val="accent1"/>
+          </a:lnRef>
+          <a:fillRef idx="3">
+            <a:schemeClr val="accent1"/>
+          </a:fillRef>
+          <a:effectRef idx="2">
+            <a:schemeClr val="accent1"/>
+          </a:effectRef>
+          <a:fontRef idx="minor">
+            <a:schemeClr val="lt1"/>
+          </a:fontRef>
+        </p:style>
+        <p:txBody>
+          <a:bodyPr rtlCol="0" anchor="t" wrap="none" lIns="0" rIns="0" tIns="115951" bIns="0"/>
+          <a:lstStyle/>
+          <a:p>
+            <a:pPr algn="l" marL="92456">
+              <a:lnSpc>
+                <a:spcPts val="984"/>
+              </a:lnSpc>
+              <a:spcBef>
+                <a:spcPts val="0"/>
+              </a:spcBef>
+              <a:spcAft>
+                <a:spcPts val="0"/>
+              </a:spcAft>
+            </a:pPr>
+            <a:r>
+              <a:rPr sz="1025" b="1">
+                <a:solidFill>
+                  <a:srgbClr val="374151"/>
+                </a:solidFill>
+                <a:latin typeface="Arial"/>
+              </a:rPr>
+              <a:t>Backward</a:t>
+            </a:r>
+          </a:p>
+          <a:p>
+            <a:pPr algn="l" marL="92456">
+              <a:lnSpc>
+                <a:spcPts val="873"/>
+              </a:lnSpc>
+              <a:spcBef>
+                <a:spcPts val="296"/>
+              </a:spcBef>
+              <a:spcAft>
+                <a:spcPts val="0"/>
+              </a:spcAft>
+            </a:pPr>
+            <a:r>
+              <a:rPr sz="910">
+                <a:solidFill>
+                  <a:srgbClr val="64748B"/>
+                </a:solidFill>
+                <a:latin typeface="Arial"/>
+              </a:rPr>
+              <a:t>grad clip 1.0</a:t>
+            </a:r>
+          </a:p>
+          <a:p>
+            <a:pPr algn="l" marL="92456">
+              <a:lnSpc>
+                <a:spcPts val="873"/>
+              </a:lnSpc>
+              <a:spcBef>
+                <a:spcPts val="486"/>
+              </a:spcBef>
+              <a:spcAft>
+                <a:spcPts val="0"/>
+              </a:spcAft>
+            </a:pPr>
+            <a:r>
+              <a:rPr sz="910">
+                <a:solidFill>
+                  <a:srgbClr val="64748B"/>
+                </a:solidFill>
+                <a:latin typeface="Arial"/>
+              </a:rPr>
+              <a:t>grads</a:t>
+            </a:r>
+          </a:p>
+        </p:txBody>
+      </p:sp>
+      <p:sp>
+        <p:nvSpPr>
+          <p:cNvPr id="32" name="Rounded Rectangle 31"/>
+          <p:cNvSpPr/>
+          <p:nvPr/>
+        </p:nvSpPr>
+        <p:spPr>
+          <a:xfrm>
+            <a:off x="8006080" y="3982720"/>
+            <a:ext cx="1463040" cy="650240"/>
+          </a:xfrm>
+          <a:prstGeom prst="roundRect">
+            <a:avLst>
+              <a:gd name="adj" fmla="val 6250"/>
+            </a:avLst>
+          </a:prstGeom>
+          <a:solidFill>
+            <a:srgbClr val="FFFFFF"/>
+          </a:solidFill>
+          <a:ln w="19050">
+            <a:solidFill>
+              <a:srgbClr val="B45309"/>
+            </a:solidFill>
+          </a:ln>
+        </p:spPr>
+        <p:style>
+          <a:lnRef idx="1">
+            <a:schemeClr val="accent1"/>
+          </a:lnRef>
+          <a:fillRef idx="3">
+            <a:schemeClr val="accent1"/>
+          </a:fillRef>
+          <a:effectRef idx="2">
+            <a:schemeClr val="accent1"/>
+          </a:effectRef>
+          <a:fontRef idx="minor">
+            <a:schemeClr val="lt1"/>
+          </a:fontRef>
+        </p:style>
+        <p:txBody>
+          <a:bodyPr rtlCol="0" anchor="t" wrap="none" lIns="0" rIns="0" tIns="115951" bIns="0"/>
+          <a:lstStyle/>
+          <a:p>
+            <a:pPr algn="l" marL="92456">
+              <a:lnSpc>
+                <a:spcPts val="984"/>
+              </a:lnSpc>
+              <a:spcBef>
+                <a:spcPts val="0"/>
+              </a:spcBef>
+              <a:spcAft>
+                <a:spcPts val="0"/>
+              </a:spcAft>
+            </a:pPr>
+            <a:r>
+              <a:rPr sz="1025" b="1">
+                <a:solidFill>
+                  <a:srgbClr val="374151"/>
+                </a:solidFill>
+                <a:latin typeface="Arial"/>
+              </a:rPr>
+              <a:t>AdamW</a:t>
+            </a:r>
+          </a:p>
+          <a:p>
+            <a:pPr algn="l" marL="92456">
+              <a:lnSpc>
+                <a:spcPts val="873"/>
+              </a:lnSpc>
+              <a:spcBef>
+                <a:spcPts val="296"/>
+              </a:spcBef>
+              <a:spcAft>
+                <a:spcPts val="0"/>
+              </a:spcAft>
+            </a:pPr>
+            <a:r>
+              <a:rPr sz="910">
+                <a:solidFill>
+                  <a:srgbClr val="64748B"/>
+                </a:solidFill>
+                <a:latin typeface="Arial"/>
+              </a:rPr>
+              <a:t>beta 0.9 / 0.95, wd 0.1</a:t>
+            </a:r>
+          </a:p>
+          <a:p>
+            <a:pPr algn="l" marL="92456">
+              <a:lnSpc>
+                <a:spcPts val="873"/>
+              </a:lnSpc>
+              <a:spcBef>
+                <a:spcPts val="486"/>
+              </a:spcBef>
+              <a:spcAft>
+                <a:spcPts val="0"/>
+              </a:spcAft>
+            </a:pPr>
+            <a:r>
+              <a:rPr sz="910">
+                <a:solidFill>
+                  <a:srgbClr val="64748B"/>
+                </a:solidFill>
+                <a:latin typeface="Arial"/>
+              </a:rPr>
+              <a:t>params</a:t>
+            </a:r>
+          </a:p>
+        </p:txBody>
+      </p:sp>
+      <p:sp>
+        <p:nvSpPr>
+          <p:cNvPr id="33" name="Rounded Rectangle 32"/>
+          <p:cNvSpPr/>
+          <p:nvPr/>
+        </p:nvSpPr>
+        <p:spPr>
+          <a:xfrm>
+            <a:off x="9631680" y="3982720"/>
+            <a:ext cx="1341120" cy="650240"/>
+          </a:xfrm>
+          <a:prstGeom prst="roundRect">
+            <a:avLst>
+              <a:gd name="adj" fmla="val 6250"/>
+            </a:avLst>
+          </a:prstGeom>
+          <a:solidFill>
+            <a:srgbClr val="FFFFFF"/>
+          </a:solidFill>
+          <a:ln w="19050">
+            <a:solidFill>
+              <a:srgbClr val="B45309"/>
+            </a:solidFill>
+          </a:ln>
+        </p:spPr>
+        <p:style>
+          <a:lnRef idx="1">
+            <a:schemeClr val="accent1"/>
+          </a:lnRef>
+          <a:fillRef idx="3">
+            <a:schemeClr val="accent1"/>
+          </a:fillRef>
+          <a:effectRef idx="2">
+            <a:schemeClr val="accent1"/>
+          </a:effectRef>
+          <a:fontRef idx="minor">
+            <a:schemeClr val="lt1"/>
+          </a:fontRef>
+        </p:style>
+        <p:txBody>
+          <a:bodyPr rtlCol="0" anchor="t" wrap="none" lIns="0" rIns="0" tIns="115951" bIns="0"/>
+          <a:lstStyle/>
+          <a:p>
+            <a:pPr algn="l" marL="92456">
+              <a:lnSpc>
+                <a:spcPts val="984"/>
+              </a:lnSpc>
+              <a:spcBef>
+                <a:spcPts val="0"/>
+              </a:spcBef>
+              <a:spcAft>
+                <a:spcPts val="0"/>
+              </a:spcAft>
+            </a:pPr>
+            <a:r>
+              <a:rPr sz="1025" b="1">
+                <a:solidFill>
+                  <a:srgbClr val="374151"/>
+                </a:solidFill>
+                <a:latin typeface="Arial"/>
+              </a:rPr>
+              <a:t>Cosine schedule</a:t>
+            </a:r>
+          </a:p>
+          <a:p>
+            <a:pPr algn="l" marL="92456">
+              <a:lnSpc>
+                <a:spcPts val="873"/>
+              </a:lnSpc>
+              <a:spcBef>
+                <a:spcPts val="296"/>
+              </a:spcBef>
+              <a:spcAft>
+                <a:spcPts val="0"/>
+              </a:spcAft>
+            </a:pPr>
+            <a:r>
+              <a:rPr sz="910">
+                <a:solidFill>
+                  <a:srgbClr val="64748B"/>
+                </a:solidFill>
+                <a:latin typeface="Arial"/>
+              </a:rPr>
+              <a:t>2k warmup steps</a:t>
+            </a:r>
+          </a:p>
+          <a:p>
+            <a:pPr algn="l" marL="92456">
+              <a:lnSpc>
+                <a:spcPts val="873"/>
+              </a:lnSpc>
+              <a:spcBef>
+                <a:spcPts val="486"/>
+              </a:spcBef>
+              <a:spcAft>
+                <a:spcPts val="0"/>
+              </a:spcAft>
+            </a:pPr>
+            <a:r>
+              <a:rPr sz="910">
+                <a:solidFill>
+                  <a:srgbClr val="64748B"/>
+                </a:solidFill>
+                <a:latin typeface="Arial"/>
+              </a:rPr>
+              <a:t>lr</a:t>
+            </a:r>
+          </a:p>
+        </p:txBody>
+      </p:sp>
+      <p:sp>
+        <p:nvSpPr>
+          <p:cNvPr id="34" name="Rounded Rectangle 33"/>
+          <p:cNvSpPr/>
+          <p:nvPr/>
+        </p:nvSpPr>
+        <p:spPr>
+          <a:xfrm>
+            <a:off x="325120" y="5283200"/>
+            <a:ext cx="6096000" cy="1137920"/>
+          </a:xfrm>
+          <a:prstGeom prst="roundRect">
+            <a:avLst>
+              <a:gd name="adj" fmla="val 3571"/>
+            </a:avLst>
+          </a:prstGeom>
+          <a:noFill/>
+          <a:ln w="19050">
+            <a:solidFill>
+              <a:srgbClr val="E2E8F0"/>
+            </a:solidFill>
+            <a:prstDash val="dash"/>
+          </a:ln>
+        </p:spPr>
+        <p:style>
+          <a:lnRef idx="1">
+            <a:schemeClr val="accent1"/>
+          </a:lnRef>
+          <a:fillRef idx="3">
+            <a:schemeClr val="accent1"/>
+          </a:fillRef>
+          <a:effectRef idx="2">
+            <a:schemeClr val="accent1"/>
+          </a:effectRef>
+          <a:fontRef idx="minor">
+            <a:schemeClr val="lt1"/>
+          </a:fontRef>
+        </p:style>
+        <p:txBody>
+          <a:bodyPr rtlCol="0" anchor="t" wrap="none" lIns="0" rIns="0" tIns="83058" bIns="0"/>
+          <a:lstStyle/>
+          <a:p>
+            <a:pPr algn="l" marL="81280">
+              <a:lnSpc>
+                <a:spcPts val="873"/>
+              </a:lnSpc>
+              <a:spcBef>
+                <a:spcPts val="0"/>
+              </a:spcBef>
+              <a:spcAft>
+                <a:spcPts val="0"/>
+              </a:spcAft>
+            </a:pPr>
+            <a:r>
+              <a:rPr sz="910" b="1">
+                <a:solidFill>
+                  <a:srgbClr val="64748B"/>
+                </a:solidFill>
+                <a:latin typeface="Arial"/>
+              </a:rPr>
+              <a:t>7. Inference</a:t>
+            </a:r>
+          </a:p>
+        </p:txBody>
+      </p:sp>
+      <p:sp>
+        <p:nvSpPr>
+          <p:cNvPr id="35" name="Rounded Rectangle 34"/>
+          <p:cNvSpPr/>
+          <p:nvPr/>
+        </p:nvSpPr>
+        <p:spPr>
+          <a:xfrm>
+            <a:off x="487680" y="5608320"/>
+            <a:ext cx="1300480" cy="650240"/>
+          </a:xfrm>
+          <a:prstGeom prst="roundRect">
+            <a:avLst>
+              <a:gd name="adj" fmla="val 6250"/>
+            </a:avLst>
+          </a:prstGeom>
+          <a:solidFill>
+            <a:srgbClr val="F8FAFC"/>
+          </a:solidFill>
+          <a:ln w="19050">
+            <a:solidFill>
+              <a:srgbClr val="475569"/>
+            </a:solidFill>
+          </a:ln>
+        </p:spPr>
+        <p:style>
+          <a:lnRef idx="1">
+            <a:schemeClr val="accent1"/>
+          </a:lnRef>
+          <a:fillRef idx="3">
+            <a:schemeClr val="accent1"/>
+          </a:fillRef>
+          <a:effectRef idx="2">
+            <a:schemeClr val="accent1"/>
+          </a:effectRef>
+          <a:fontRef idx="minor">
+            <a:schemeClr val="lt1"/>
+          </a:fontRef>
+        </p:style>
+        <p:txBody>
+          <a:bodyPr rtlCol="0" anchor="t" wrap="none" lIns="0" rIns="0" tIns="115951" bIns="0"/>
+          <a:lstStyle/>
+          <a:p>
+            <a:pPr algn="l" marL="92456">
+              <a:lnSpc>
+                <a:spcPts val="984"/>
+              </a:lnSpc>
+              <a:spcBef>
+                <a:spcPts val="0"/>
+              </a:spcBef>
+              <a:spcAft>
+                <a:spcPts val="0"/>
+              </a:spcAft>
+            </a:pPr>
+            <a:r>
+              <a:rPr sz="1025" b="1">
+                <a:solidFill>
+                  <a:srgbClr val="374151"/>
+                </a:solidFill>
+                <a:latin typeface="Arial"/>
+              </a:rPr>
+              <a:t>KV cache</a:t>
+            </a:r>
+          </a:p>
+          <a:p>
+            <a:pPr algn="l" marL="92456">
+              <a:lnSpc>
+                <a:spcPts val="873"/>
+              </a:lnSpc>
+              <a:spcBef>
+                <a:spcPts val="296"/>
+              </a:spcBef>
+              <a:spcAft>
+                <a:spcPts val="0"/>
+              </a:spcAft>
+            </a:pPr>
+            <a:r>
+              <a:rPr sz="910">
+                <a:solidFill>
+                  <a:srgbClr val="64748B"/>
+                </a:solidFill>
+                <a:latin typeface="Arial"/>
+              </a:rPr>
+              <a:t>per layer, per head</a:t>
+            </a:r>
+          </a:p>
+          <a:p>
+            <a:pPr algn="l" marL="92456">
+              <a:lnSpc>
+                <a:spcPts val="873"/>
+              </a:lnSpc>
+              <a:spcBef>
+                <a:spcPts val="486"/>
+              </a:spcBef>
+              <a:spcAft>
+                <a:spcPts val="0"/>
+              </a:spcAft>
+            </a:pPr>
+            <a:r>
+              <a:rPr sz="910">
+                <a:solidFill>
+                  <a:srgbClr val="64748B"/>
+                </a:solidFill>
+                <a:latin typeface="Arial"/>
+              </a:rPr>
+              <a:t>(B, H, L, d/H)</a:t>
+            </a:r>
+          </a:p>
+        </p:txBody>
+      </p:sp>
+      <p:sp>
+        <p:nvSpPr>
+          <p:cNvPr id="36" name="Rounded Rectangle 35"/>
+          <p:cNvSpPr/>
+          <p:nvPr/>
+        </p:nvSpPr>
+        <p:spPr>
+          <a:xfrm>
+            <a:off x="1950720" y="5608320"/>
+            <a:ext cx="1341120" cy="650240"/>
+          </a:xfrm>
+          <a:prstGeom prst="roundRect">
+            <a:avLst>
+              <a:gd name="adj" fmla="val 6250"/>
+            </a:avLst>
+          </a:prstGeom>
+          <a:solidFill>
+            <a:srgbClr val="F8FAFC"/>
+          </a:solidFill>
+          <a:ln w="19050">
+            <a:solidFill>
+              <a:srgbClr val="1E3A5F"/>
+            </a:solidFill>
+          </a:ln>
+        </p:spPr>
+        <p:style>
+          <a:lnRef idx="1">
+            <a:schemeClr val="accent1"/>
+          </a:lnRef>
+          <a:fillRef idx="3">
+            <a:schemeClr val="accent1"/>
+          </a:fillRef>
+          <a:effectRef idx="2">
+            <a:schemeClr val="accent1"/>
+          </a:effectRef>
+          <a:fontRef idx="minor">
+            <a:schemeClr val="lt1"/>
+          </a:fontRef>
+        </p:style>
+        <p:txBody>
+          <a:bodyPr rtlCol="0" anchor="t" wrap="none" lIns="0" rIns="0" tIns="115951" bIns="0"/>
+          <a:lstStyle/>
+          <a:p>
+            <a:pPr algn="l" marL="92456">
+              <a:lnSpc>
+                <a:spcPts val="984"/>
+              </a:lnSpc>
+              <a:spcBef>
+                <a:spcPts val="0"/>
+              </a:spcBef>
+              <a:spcAft>
+                <a:spcPts val="0"/>
+              </a:spcAft>
+            </a:pPr>
+            <a:r>
+              <a:rPr sz="1025" b="1">
+                <a:solidFill>
+                  <a:srgbClr val="374151"/>
+                </a:solidFill>
+                <a:latin typeface="Arial"/>
+              </a:rPr>
+              <a:t>Incremental step</a:t>
+            </a:r>
+          </a:p>
+          <a:p>
+            <a:pPr algn="l" marL="92456">
+              <a:lnSpc>
+                <a:spcPts val="873"/>
+              </a:lnSpc>
+              <a:spcBef>
+                <a:spcPts val="296"/>
+              </a:spcBef>
+              <a:spcAft>
+                <a:spcPts val="0"/>
+              </a:spcAft>
+            </a:pPr>
+            <a:r>
+              <a:rPr sz="910">
+                <a:solidFill>
+                  <a:srgbClr val="64748B"/>
+                </a:solidFill>
+                <a:latin typeface="Arial"/>
+              </a:rPr>
+              <a:t>one token at a time</a:t>
+            </a:r>
+          </a:p>
+          <a:p>
+            <a:pPr algn="l" marL="92456">
+              <a:lnSpc>
+                <a:spcPts val="873"/>
+              </a:lnSpc>
+              <a:spcBef>
+                <a:spcPts val="486"/>
+              </a:spcBef>
+              <a:spcAft>
+                <a:spcPts val="0"/>
+              </a:spcAft>
+            </a:pPr>
+            <a:r>
+              <a:rPr sz="910">
+                <a:solidFill>
+                  <a:srgbClr val="64748B"/>
+                </a:solidFill>
+                <a:latin typeface="Arial"/>
+              </a:rPr>
+              <a:t>(B, 1, d)</a:t>
+            </a:r>
+          </a:p>
+        </p:txBody>
+      </p:sp>
+      <p:sp>
+        <p:nvSpPr>
+          <p:cNvPr id="37" name="Rounded Rectangle 36"/>
+          <p:cNvSpPr/>
+          <p:nvPr/>
+        </p:nvSpPr>
+        <p:spPr>
+          <a:xfrm>
+            <a:off x="3454400" y="5608320"/>
+            <a:ext cx="1300480" cy="650240"/>
+          </a:xfrm>
+          <a:prstGeom prst="roundRect">
+            <a:avLst>
+              <a:gd name="adj" fmla="val 6250"/>
+            </a:avLst>
+          </a:prstGeom>
+          <a:solidFill>
+            <a:srgbClr val="F8FAFC"/>
+          </a:solidFill>
+          <a:ln w="19050">
+            <a:solidFill>
+              <a:srgbClr val="475569"/>
+            </a:solidFill>
+          </a:ln>
+        </p:spPr>
+        <p:style>
+          <a:lnRef idx="1">
+            <a:schemeClr val="accent1"/>
+          </a:lnRef>
+          <a:fillRef idx="3">
+            <a:schemeClr val="accent1"/>
+          </a:fillRef>
+          <a:effectRef idx="2">
+            <a:schemeClr val="accent1"/>
+          </a:effectRef>
+          <a:fontRef idx="minor">
+            <a:schemeClr val="lt1"/>
+          </a:fontRef>
+        </p:style>
+        <p:txBody>
+          <a:bodyPr rtlCol="0" anchor="t" wrap="none" lIns="0" rIns="0" tIns="115951" bIns="0"/>
+          <a:lstStyle/>
+          <a:p>
+            <a:pPr algn="l" marL="92456">
+              <a:lnSpc>
+                <a:spcPts val="984"/>
+              </a:lnSpc>
+              <a:spcBef>
+                <a:spcPts val="0"/>
+              </a:spcBef>
+              <a:spcAft>
+                <a:spcPts val="0"/>
+              </a:spcAft>
+            </a:pPr>
+            <a:r>
+              <a:rPr sz="1025" b="1">
+                <a:solidFill>
+                  <a:srgbClr val="374151"/>
+                </a:solidFill>
+                <a:latin typeface="Arial"/>
+              </a:rPr>
+              <a:t>Sampling</a:t>
+            </a:r>
+          </a:p>
+          <a:p>
+            <a:pPr algn="l" marL="92456">
+              <a:lnSpc>
+                <a:spcPts val="873"/>
+              </a:lnSpc>
+              <a:spcBef>
+                <a:spcPts val="296"/>
+              </a:spcBef>
+              <a:spcAft>
+                <a:spcPts val="0"/>
+              </a:spcAft>
+            </a:pPr>
+            <a:r>
+              <a:rPr sz="910">
+                <a:solidFill>
+                  <a:srgbClr val="64748B"/>
+                </a:solidFill>
+                <a:latin typeface="Arial"/>
+              </a:rPr>
+              <a:t>top-p 0.9, temp 0.8</a:t>
+            </a:r>
+          </a:p>
+          <a:p>
+            <a:pPr algn="l" marL="92456">
+              <a:lnSpc>
+                <a:spcPts val="873"/>
+              </a:lnSpc>
+              <a:spcBef>
+                <a:spcPts val="486"/>
+              </a:spcBef>
+              <a:spcAft>
+                <a:spcPts val="0"/>
+              </a:spcAft>
+            </a:pPr>
+            <a:r>
+              <a:rPr sz="910">
+                <a:solidFill>
+                  <a:srgbClr val="64748B"/>
+                </a:solidFill>
+                <a:latin typeface="Arial"/>
+              </a:rPr>
+              <a:t>(B, 1)</a:t>
+            </a:r>
+          </a:p>
+        </p:txBody>
+      </p:sp>
+      <p:sp>
+        <p:nvSpPr>
+          <p:cNvPr id="38" name="Rounded Rectangle 37"/>
+          <p:cNvSpPr/>
+          <p:nvPr/>
+        </p:nvSpPr>
+        <p:spPr>
+          <a:xfrm>
+            <a:off x="4917440" y="5689600"/>
+            <a:ext cx="1341120" cy="487680"/>
           </a:xfrm>
           <a:prstGeom prst="roundRect">
             <a:avLst>
@@ -5938,7 +6663,7 @@
           </a:solidFill>
           <a:ln w="19050">
             <a:solidFill>
-              <a:srgbClr val="B45309"/>
+              <a:srgbClr val="64748B"/>
             </a:solidFill>
           </a:ln>
         </p:spPr>
@@ -5957,12 +6682,12 @@
           </a:fontRef>
         </p:style>
         <p:txBody>
-          <a:bodyPr rtlCol="0" anchor="t" wrap="none" lIns="0" rIns="0" tIns="104140" bIns="0"/>
+          <a:bodyPr rtlCol="0" anchor="t" wrap="none" lIns="0" rIns="0" tIns="115951" bIns="0"/>
           <a:lstStyle/>
           <a:p>
-            <a:pPr algn="l" marL="81280">
+            <a:pPr algn="l" marL="92456">
               <a:lnSpc>
-                <a:spcPts val="864"/>
+                <a:spcPts val="984"/>
               </a:lnSpc>
               <a:spcBef>
                 <a:spcPts val="0"/>
@@ -5972,732 +6697,7 @@
               </a:spcAft>
             </a:pPr>
             <a:r>
-              <a:rPr sz="900" b="1">
-                <a:solidFill>
-                  <a:srgbClr val="374151"/>
-                </a:solidFill>
-                <a:latin typeface="Arial"/>
-              </a:rPr>
-              <a:t>Backward</a:t>
-            </a:r>
-          </a:p>
-          <a:p>
-            <a:pPr algn="l" marL="81280">
-              <a:lnSpc>
-                <a:spcPts val="768"/>
-              </a:lnSpc>
-              <a:spcBef>
-                <a:spcPts val="96"/>
-              </a:spcBef>
-              <a:spcAft>
-                <a:spcPts val="0"/>
-              </a:spcAft>
-            </a:pPr>
-            <a:r>
-              <a:rPr sz="800">
-                <a:solidFill>
-                  <a:srgbClr val="64748B"/>
-                </a:solidFill>
-                <a:latin typeface="Arial"/>
-              </a:rPr>
-              <a:t>grad clip 1.0</a:t>
-            </a:r>
-          </a:p>
-          <a:p>
-            <a:pPr algn="l" marL="81280">
-              <a:lnSpc>
-                <a:spcPts val="768"/>
-              </a:lnSpc>
-              <a:spcBef>
-                <a:spcPts val="272"/>
-              </a:spcBef>
-              <a:spcAft>
-                <a:spcPts val="0"/>
-              </a:spcAft>
-            </a:pPr>
-            <a:r>
-              <a:rPr sz="800">
-                <a:solidFill>
-                  <a:srgbClr val="64748B"/>
-                </a:solidFill>
-                <a:latin typeface="Arial"/>
-              </a:rPr>
-              <a:t>grads</a:t>
-            </a:r>
-          </a:p>
-        </p:txBody>
-      </p:sp>
-      <p:sp>
-        <p:nvSpPr>
-          <p:cNvPr id="32" name="Rounded Rectangle 31"/>
-          <p:cNvSpPr/>
-          <p:nvPr/>
-        </p:nvSpPr>
-        <p:spPr>
-          <a:xfrm>
-            <a:off x="2600960" y="3291840"/>
-            <a:ext cx="1300480" cy="487680"/>
-          </a:xfrm>
-          <a:prstGeom prst="roundRect">
-            <a:avLst>
-              <a:gd name="adj" fmla="val 8333"/>
-            </a:avLst>
-          </a:prstGeom>
-          <a:solidFill>
-            <a:srgbClr val="FFFFFF"/>
-          </a:solidFill>
-          <a:ln w="19050">
-            <a:solidFill>
-              <a:srgbClr val="B45309"/>
-            </a:solidFill>
-          </a:ln>
-        </p:spPr>
-        <p:style>
-          <a:lnRef idx="1">
-            <a:schemeClr val="accent1"/>
-          </a:lnRef>
-          <a:fillRef idx="3">
-            <a:schemeClr val="accent1"/>
-          </a:fillRef>
-          <a:effectRef idx="2">
-            <a:schemeClr val="accent1"/>
-          </a:effectRef>
-          <a:fontRef idx="minor">
-            <a:schemeClr val="lt1"/>
-          </a:fontRef>
-        </p:style>
-        <p:txBody>
-          <a:bodyPr rtlCol="0" anchor="t" wrap="none" lIns="0" rIns="0" tIns="104140" bIns="0"/>
-          <a:lstStyle/>
-          <a:p>
-            <a:pPr algn="l" marL="81280">
-              <a:lnSpc>
-                <a:spcPts val="864"/>
-              </a:lnSpc>
-              <a:spcBef>
-                <a:spcPts val="0"/>
-              </a:spcBef>
-              <a:spcAft>
-                <a:spcPts val="0"/>
-              </a:spcAft>
-            </a:pPr>
-            <a:r>
-              <a:rPr sz="900" b="1">
-                <a:solidFill>
-                  <a:srgbClr val="374151"/>
-                </a:solidFill>
-                <a:latin typeface="Arial"/>
-              </a:rPr>
-              <a:t>AdamW</a:t>
-            </a:r>
-          </a:p>
-          <a:p>
-            <a:pPr algn="l" marL="81280">
-              <a:lnSpc>
-                <a:spcPts val="768"/>
-              </a:lnSpc>
-              <a:spcBef>
-                <a:spcPts val="96"/>
-              </a:spcBef>
-              <a:spcAft>
-                <a:spcPts val="0"/>
-              </a:spcAft>
-            </a:pPr>
-            <a:r>
-              <a:rPr sz="800">
-                <a:solidFill>
-                  <a:srgbClr val="64748B"/>
-                </a:solidFill>
-                <a:latin typeface="Arial"/>
-              </a:rPr>
-              <a:t>beta 0.9 / 0.95, wd 0.1</a:t>
-            </a:r>
-          </a:p>
-          <a:p>
-            <a:pPr algn="l" marL="81280">
-              <a:lnSpc>
-                <a:spcPts val="768"/>
-              </a:lnSpc>
-              <a:spcBef>
-                <a:spcPts val="272"/>
-              </a:spcBef>
-              <a:spcAft>
-                <a:spcPts val="0"/>
-              </a:spcAft>
-            </a:pPr>
-            <a:r>
-              <a:rPr sz="800">
-                <a:solidFill>
-                  <a:srgbClr val="64748B"/>
-                </a:solidFill>
-                <a:latin typeface="Arial"/>
-              </a:rPr>
-              <a:t>params</a:t>
-            </a:r>
-          </a:p>
-        </p:txBody>
-      </p:sp>
-      <p:sp>
-        <p:nvSpPr>
-          <p:cNvPr id="33" name="Rounded Rectangle 32"/>
-          <p:cNvSpPr/>
-          <p:nvPr/>
-        </p:nvSpPr>
-        <p:spPr>
-          <a:xfrm>
-            <a:off x="4023360" y="3291840"/>
-            <a:ext cx="1219200" cy="487680"/>
-          </a:xfrm>
-          <a:prstGeom prst="roundRect">
-            <a:avLst>
-              <a:gd name="adj" fmla="val 8333"/>
-            </a:avLst>
-          </a:prstGeom>
-          <a:solidFill>
-            <a:srgbClr val="FFFFFF"/>
-          </a:solidFill>
-          <a:ln w="19050">
-            <a:solidFill>
-              <a:srgbClr val="B45309"/>
-            </a:solidFill>
-          </a:ln>
-        </p:spPr>
-        <p:style>
-          <a:lnRef idx="1">
-            <a:schemeClr val="accent1"/>
-          </a:lnRef>
-          <a:fillRef idx="3">
-            <a:schemeClr val="accent1"/>
-          </a:fillRef>
-          <a:effectRef idx="2">
-            <a:schemeClr val="accent1"/>
-          </a:effectRef>
-          <a:fontRef idx="minor">
-            <a:schemeClr val="lt1"/>
-          </a:fontRef>
-        </p:style>
-        <p:txBody>
-          <a:bodyPr rtlCol="0" anchor="t" wrap="none" lIns="0" rIns="0" tIns="104140" bIns="0"/>
-          <a:lstStyle/>
-          <a:p>
-            <a:pPr algn="l" marL="81280">
-              <a:lnSpc>
-                <a:spcPts val="864"/>
-              </a:lnSpc>
-              <a:spcBef>
-                <a:spcPts val="0"/>
-              </a:spcBef>
-              <a:spcAft>
-                <a:spcPts val="0"/>
-              </a:spcAft>
-            </a:pPr>
-            <a:r>
-              <a:rPr sz="900" b="1">
-                <a:solidFill>
-                  <a:srgbClr val="374151"/>
-                </a:solidFill>
-                <a:latin typeface="Arial"/>
-              </a:rPr>
-              <a:t>Cosine schedule</a:t>
-            </a:r>
-          </a:p>
-          <a:p>
-            <a:pPr algn="l" marL="81280">
-              <a:lnSpc>
-                <a:spcPts val="768"/>
-              </a:lnSpc>
-              <a:spcBef>
-                <a:spcPts val="96"/>
-              </a:spcBef>
-              <a:spcAft>
-                <a:spcPts val="0"/>
-              </a:spcAft>
-            </a:pPr>
-            <a:r>
-              <a:rPr sz="800">
-                <a:solidFill>
-                  <a:srgbClr val="64748B"/>
-                </a:solidFill>
-                <a:latin typeface="Arial"/>
-              </a:rPr>
-              <a:t>2k warmup steps</a:t>
-            </a:r>
-          </a:p>
-          <a:p>
-            <a:pPr algn="l" marL="81280">
-              <a:lnSpc>
-                <a:spcPts val="768"/>
-              </a:lnSpc>
-              <a:spcBef>
-                <a:spcPts val="272"/>
-              </a:spcBef>
-              <a:spcAft>
-                <a:spcPts val="0"/>
-              </a:spcAft>
-            </a:pPr>
-            <a:r>
-              <a:rPr sz="800">
-                <a:solidFill>
-                  <a:srgbClr val="64748B"/>
-                </a:solidFill>
-                <a:latin typeface="Arial"/>
-              </a:rPr>
-              <a:t>lr</a:t>
-            </a:r>
-          </a:p>
-        </p:txBody>
-      </p:sp>
-      <p:sp>
-        <p:nvSpPr>
-          <p:cNvPr id="34" name="Rounded Rectangle 33"/>
-          <p:cNvSpPr/>
-          <p:nvPr/>
-        </p:nvSpPr>
-        <p:spPr>
-          <a:xfrm>
-            <a:off x="5486400" y="3007360"/>
-            <a:ext cx="5323840" cy="894080"/>
-          </a:xfrm>
-          <a:prstGeom prst="roundRect">
-            <a:avLst>
-              <a:gd name="adj" fmla="val 4545"/>
-            </a:avLst>
-          </a:prstGeom>
-          <a:noFill/>
-          <a:ln w="19050">
-            <a:solidFill>
-              <a:srgbClr val="E2E8F0"/>
-            </a:solidFill>
-            <a:prstDash val="dash"/>
-          </a:ln>
-        </p:spPr>
-        <p:style>
-          <a:lnRef idx="1">
-            <a:schemeClr val="accent1"/>
-          </a:lnRef>
-          <a:fillRef idx="3">
-            <a:schemeClr val="accent1"/>
-          </a:fillRef>
-          <a:effectRef idx="2">
-            <a:schemeClr val="accent1"/>
-          </a:effectRef>
-          <a:fontRef idx="minor">
-            <a:schemeClr val="lt1"/>
-          </a:fontRef>
-        </p:style>
-        <p:txBody>
-          <a:bodyPr rtlCol="0" anchor="t" wrap="none" lIns="0" rIns="0" tIns="91440" bIns="0"/>
-          <a:lstStyle/>
-          <a:p>
-            <a:pPr algn="l" marL="81280">
-              <a:lnSpc>
-                <a:spcPts val="768"/>
-              </a:lnSpc>
-              <a:spcBef>
-                <a:spcPts val="0"/>
-              </a:spcBef>
-              <a:spcAft>
-                <a:spcPts val="0"/>
-              </a:spcAft>
-            </a:pPr>
-            <a:r>
-              <a:rPr sz="800" b="1">
-                <a:solidFill>
-                  <a:srgbClr val="64748B"/>
-                </a:solidFill>
-                <a:latin typeface="Arial"/>
-              </a:rPr>
-              <a:t>7. Inference</a:t>
-            </a:r>
-          </a:p>
-        </p:txBody>
-      </p:sp>
-      <p:sp>
-        <p:nvSpPr>
-          <p:cNvPr id="35" name="Rounded Rectangle 34"/>
-          <p:cNvSpPr/>
-          <p:nvPr/>
-        </p:nvSpPr>
-        <p:spPr>
-          <a:xfrm>
-            <a:off x="5608320" y="3291840"/>
-            <a:ext cx="1137920" cy="487680"/>
-          </a:xfrm>
-          <a:prstGeom prst="roundRect">
-            <a:avLst>
-              <a:gd name="adj" fmla="val 8333"/>
-            </a:avLst>
-          </a:prstGeom>
-          <a:solidFill>
-            <a:srgbClr val="F8FAFC"/>
-          </a:solidFill>
-          <a:ln w="19050">
-            <a:solidFill>
-              <a:srgbClr val="475569"/>
-            </a:solidFill>
-          </a:ln>
-        </p:spPr>
-        <p:style>
-          <a:lnRef idx="1">
-            <a:schemeClr val="accent1"/>
-          </a:lnRef>
-          <a:fillRef idx="3">
-            <a:schemeClr val="accent1"/>
-          </a:fillRef>
-          <a:effectRef idx="2">
-            <a:schemeClr val="accent1"/>
-          </a:effectRef>
-          <a:fontRef idx="minor">
-            <a:schemeClr val="lt1"/>
-          </a:fontRef>
-        </p:style>
-        <p:txBody>
-          <a:bodyPr rtlCol="0" anchor="t" wrap="none" lIns="0" rIns="0" tIns="104140" bIns="0"/>
-          <a:lstStyle/>
-          <a:p>
-            <a:pPr algn="l" marL="81280">
-              <a:lnSpc>
-                <a:spcPts val="864"/>
-              </a:lnSpc>
-              <a:spcBef>
-                <a:spcPts val="0"/>
-              </a:spcBef>
-              <a:spcAft>
-                <a:spcPts val="0"/>
-              </a:spcAft>
-            </a:pPr>
-            <a:r>
-              <a:rPr sz="900" b="1">
-                <a:solidFill>
-                  <a:srgbClr val="374151"/>
-                </a:solidFill>
-                <a:latin typeface="Arial"/>
-              </a:rPr>
-              <a:t>KV cache</a:t>
-            </a:r>
-          </a:p>
-          <a:p>
-            <a:pPr algn="l" marL="81280">
-              <a:lnSpc>
-                <a:spcPts val="768"/>
-              </a:lnSpc>
-              <a:spcBef>
-                <a:spcPts val="96"/>
-              </a:spcBef>
-              <a:spcAft>
-                <a:spcPts val="0"/>
-              </a:spcAft>
-            </a:pPr>
-            <a:r>
-              <a:rPr sz="800">
-                <a:solidFill>
-                  <a:srgbClr val="64748B"/>
-                </a:solidFill>
-                <a:latin typeface="Arial"/>
-              </a:rPr>
-              <a:t>per layer, per head</a:t>
-            </a:r>
-          </a:p>
-          <a:p>
-            <a:pPr algn="l" marL="81280">
-              <a:lnSpc>
-                <a:spcPts val="768"/>
-              </a:lnSpc>
-              <a:spcBef>
-                <a:spcPts val="272"/>
-              </a:spcBef>
-              <a:spcAft>
-                <a:spcPts val="0"/>
-              </a:spcAft>
-            </a:pPr>
-            <a:r>
-              <a:rPr sz="800">
-                <a:solidFill>
-                  <a:srgbClr val="64748B"/>
-                </a:solidFill>
-                <a:latin typeface="Arial"/>
-              </a:rPr>
-              <a:t>(B, H, L, d/H)</a:t>
-            </a:r>
-          </a:p>
-        </p:txBody>
-      </p:sp>
-      <p:sp>
-        <p:nvSpPr>
-          <p:cNvPr id="36" name="Rounded Rectangle 35"/>
-          <p:cNvSpPr/>
-          <p:nvPr/>
-        </p:nvSpPr>
-        <p:spPr>
-          <a:xfrm>
-            <a:off x="6868160" y="3291840"/>
-            <a:ext cx="1219200" cy="487680"/>
-          </a:xfrm>
-          <a:prstGeom prst="roundRect">
-            <a:avLst>
-              <a:gd name="adj" fmla="val 8333"/>
-            </a:avLst>
-          </a:prstGeom>
-          <a:solidFill>
-            <a:srgbClr val="F8FAFC"/>
-          </a:solidFill>
-          <a:ln w="19050">
-            <a:solidFill>
-              <a:srgbClr val="1E3A5F"/>
-            </a:solidFill>
-          </a:ln>
-        </p:spPr>
-        <p:style>
-          <a:lnRef idx="1">
-            <a:schemeClr val="accent1"/>
-          </a:lnRef>
-          <a:fillRef idx="3">
-            <a:schemeClr val="accent1"/>
-          </a:fillRef>
-          <a:effectRef idx="2">
-            <a:schemeClr val="accent1"/>
-          </a:effectRef>
-          <a:fontRef idx="minor">
-            <a:schemeClr val="lt1"/>
-          </a:fontRef>
-        </p:style>
-        <p:txBody>
-          <a:bodyPr rtlCol="0" anchor="t" wrap="none" lIns="0" rIns="0" tIns="104140" bIns="0"/>
-          <a:lstStyle/>
-          <a:p>
-            <a:pPr algn="l" marL="81280">
-              <a:lnSpc>
-                <a:spcPts val="864"/>
-              </a:lnSpc>
-              <a:spcBef>
-                <a:spcPts val="0"/>
-              </a:spcBef>
-              <a:spcAft>
-                <a:spcPts val="0"/>
-              </a:spcAft>
-            </a:pPr>
-            <a:r>
-              <a:rPr sz="900" b="1">
-                <a:solidFill>
-                  <a:srgbClr val="374151"/>
-                </a:solidFill>
-                <a:latin typeface="Arial"/>
-              </a:rPr>
-              <a:t>Incremental step</a:t>
-            </a:r>
-          </a:p>
-          <a:p>
-            <a:pPr algn="l" marL="81280">
-              <a:lnSpc>
-                <a:spcPts val="768"/>
-              </a:lnSpc>
-              <a:spcBef>
-                <a:spcPts val="96"/>
-              </a:spcBef>
-              <a:spcAft>
-                <a:spcPts val="0"/>
-              </a:spcAft>
-            </a:pPr>
-            <a:r>
-              <a:rPr sz="800">
-                <a:solidFill>
-                  <a:srgbClr val="64748B"/>
-                </a:solidFill>
-                <a:latin typeface="Arial"/>
-              </a:rPr>
-              <a:t>one token at a time</a:t>
-            </a:r>
-          </a:p>
-          <a:p>
-            <a:pPr algn="l" marL="81280">
-              <a:lnSpc>
-                <a:spcPts val="768"/>
-              </a:lnSpc>
-              <a:spcBef>
-                <a:spcPts val="272"/>
-              </a:spcBef>
-              <a:spcAft>
-                <a:spcPts val="0"/>
-              </a:spcAft>
-            </a:pPr>
-            <a:r>
-              <a:rPr sz="800">
-                <a:solidFill>
-                  <a:srgbClr val="64748B"/>
-                </a:solidFill>
-                <a:latin typeface="Arial"/>
-              </a:rPr>
-              <a:t>(B, 1, d)</a:t>
-            </a:r>
-          </a:p>
-        </p:txBody>
-      </p:sp>
-      <p:sp>
-        <p:nvSpPr>
-          <p:cNvPr id="37" name="Rounded Rectangle 36"/>
-          <p:cNvSpPr/>
-          <p:nvPr/>
-        </p:nvSpPr>
-        <p:spPr>
-          <a:xfrm>
-            <a:off x="8209280" y="3291840"/>
-            <a:ext cx="1137920" cy="487680"/>
-          </a:xfrm>
-          <a:prstGeom prst="roundRect">
-            <a:avLst>
-              <a:gd name="adj" fmla="val 8333"/>
-            </a:avLst>
-          </a:prstGeom>
-          <a:solidFill>
-            <a:srgbClr val="F8FAFC"/>
-          </a:solidFill>
-          <a:ln w="19050">
-            <a:solidFill>
-              <a:srgbClr val="475569"/>
-            </a:solidFill>
-          </a:ln>
-        </p:spPr>
-        <p:style>
-          <a:lnRef idx="1">
-            <a:schemeClr val="accent1"/>
-          </a:lnRef>
-          <a:fillRef idx="3">
-            <a:schemeClr val="accent1"/>
-          </a:fillRef>
-          <a:effectRef idx="2">
-            <a:schemeClr val="accent1"/>
-          </a:effectRef>
-          <a:fontRef idx="minor">
-            <a:schemeClr val="lt1"/>
-          </a:fontRef>
-        </p:style>
-        <p:txBody>
-          <a:bodyPr rtlCol="0" anchor="t" wrap="none" lIns="0" rIns="0" tIns="104140" bIns="0"/>
-          <a:lstStyle/>
-          <a:p>
-            <a:pPr algn="l" marL="81280">
-              <a:lnSpc>
-                <a:spcPts val="864"/>
-              </a:lnSpc>
-              <a:spcBef>
-                <a:spcPts val="0"/>
-              </a:spcBef>
-              <a:spcAft>
-                <a:spcPts val="0"/>
-              </a:spcAft>
-            </a:pPr>
-            <a:r>
-              <a:rPr sz="900" b="1">
-                <a:solidFill>
-                  <a:srgbClr val="374151"/>
-                </a:solidFill>
-                <a:latin typeface="Arial"/>
-              </a:rPr>
-              <a:t>Sampling</a:t>
-            </a:r>
-          </a:p>
-          <a:p>
-            <a:pPr algn="l" marL="81280">
-              <a:lnSpc>
-                <a:spcPts val="768"/>
-              </a:lnSpc>
-              <a:spcBef>
-                <a:spcPts val="96"/>
-              </a:spcBef>
-              <a:spcAft>
-                <a:spcPts val="0"/>
-              </a:spcAft>
-            </a:pPr>
-            <a:r>
-              <a:rPr sz="800">
-                <a:solidFill>
-                  <a:srgbClr val="64748B"/>
-                </a:solidFill>
-                <a:latin typeface="Arial"/>
-              </a:rPr>
-              <a:t>top-p 0.9, temp 0.8</a:t>
-            </a:r>
-          </a:p>
-          <a:p>
-            <a:pPr algn="l" marL="81280">
-              <a:lnSpc>
-                <a:spcPts val="768"/>
-              </a:lnSpc>
-              <a:spcBef>
-                <a:spcPts val="272"/>
-              </a:spcBef>
-              <a:spcAft>
-                <a:spcPts val="0"/>
-              </a:spcAft>
-            </a:pPr>
-            <a:r>
-              <a:rPr sz="800">
-                <a:solidFill>
-                  <a:srgbClr val="64748B"/>
-                </a:solidFill>
-                <a:latin typeface="Arial"/>
-              </a:rPr>
-              <a:t>(B, 1)</a:t>
-            </a:r>
-          </a:p>
-        </p:txBody>
-      </p:sp>
-      <p:sp>
-        <p:nvSpPr>
-          <p:cNvPr id="38" name="Rounded Rectangle 37"/>
-          <p:cNvSpPr/>
-          <p:nvPr/>
-        </p:nvSpPr>
-        <p:spPr>
-          <a:xfrm>
-            <a:off x="9469120" y="3332480"/>
-            <a:ext cx="1219200" cy="365760"/>
-          </a:xfrm>
-          <a:prstGeom prst="roundRect">
-            <a:avLst>
-              <a:gd name="adj" fmla="val 11111"/>
-            </a:avLst>
-          </a:prstGeom>
-          <a:solidFill>
-            <a:srgbClr val="FFFFFF"/>
-          </a:solidFill>
-          <a:ln w="19050">
-            <a:solidFill>
-              <a:srgbClr val="64748B"/>
-            </a:solidFill>
-          </a:ln>
-        </p:spPr>
-        <p:style>
-          <a:lnRef idx="1">
-            <a:schemeClr val="accent1"/>
-          </a:lnRef>
-          <a:fillRef idx="3">
-            <a:schemeClr val="accent1"/>
-          </a:fillRef>
-          <a:effectRef idx="2">
-            <a:schemeClr val="accent1"/>
-          </a:effectRef>
-          <a:fontRef idx="minor">
-            <a:schemeClr val="lt1"/>
-          </a:fontRef>
-        </p:style>
-        <p:txBody>
-          <a:bodyPr rtlCol="0" anchor="t" wrap="none" lIns="0" rIns="0" tIns="104140" bIns="0"/>
-          <a:lstStyle/>
-          <a:p>
-            <a:pPr algn="l" marL="81280">
-              <a:lnSpc>
-                <a:spcPts val="864"/>
-              </a:lnSpc>
-              <a:spcBef>
-                <a:spcPts val="0"/>
-              </a:spcBef>
-              <a:spcAft>
-                <a:spcPts val="0"/>
-              </a:spcAft>
-            </a:pPr>
-            <a:r>
-              <a:rPr sz="900" b="1">
+              <a:rPr sz="1025" b="1">
                 <a:solidFill>
                   <a:srgbClr val="374151"/>
                 </a:solidFill>
@@ -6707,19 +6707,19 @@
             </a:r>
           </a:p>
           <a:p>
-            <a:pPr algn="l" marL="81280">
+            <a:pPr algn="l" marL="92456">
               <a:lnSpc>
-                <a:spcPts val="768"/>
+                <a:spcPts val="873"/>
               </a:lnSpc>
               <a:spcBef>
-                <a:spcPts val="176"/>
+                <a:spcPts val="376"/>
               </a:spcBef>
               <a:spcAft>
                 <a:spcPts val="0"/>
               </a:spcAft>
             </a:pPr>
             <a:r>
-              <a:rPr sz="800">
+              <a:rPr sz="910">
                 <a:solidFill>
                   <a:srgbClr val="64748B"/>
                 </a:solidFill>
@@ -6738,8 +6738,8 @@
         </p:nvCxnSpPr>
         <p:spPr>
           <a:xfrm>
-            <a:off x="1503680" y="3535680"/>
-            <a:ext cx="121920" cy="0"/>
+            <a:off x="6746240" y="4307840"/>
+            <a:ext cx="162560" cy="0"/>
           </a:xfrm>
           <a:prstGeom prst="line">
             <a:avLst/>
@@ -6774,8 +6774,8 @@
         </p:nvCxnSpPr>
         <p:spPr>
           <a:xfrm>
-            <a:off x="2479040" y="3535680"/>
-            <a:ext cx="121920" cy="0"/>
+            <a:off x="7843520" y="4307840"/>
+            <a:ext cx="162560" cy="0"/>
           </a:xfrm>
           <a:prstGeom prst="line">
             <a:avLst/>
@@ -6810,8 +6810,8 @@
         </p:nvCxnSpPr>
         <p:spPr>
           <a:xfrm>
-            <a:off x="3901440" y="3535680"/>
-            <a:ext cx="121920" cy="0"/>
+            <a:off x="9469120" y="4307840"/>
+            <a:ext cx="162560" cy="0"/>
           </a:xfrm>
           <a:prstGeom prst="line">
             <a:avLst/>
@@ -6846,8 +6846,8 @@
         </p:nvCxnSpPr>
         <p:spPr>
           <a:xfrm>
-            <a:off x="6746240" y="3535680"/>
-            <a:ext cx="121920" cy="0"/>
+            <a:off x="1788160" y="5933440"/>
+            <a:ext cx="162560" cy="0"/>
           </a:xfrm>
           <a:prstGeom prst="line">
             <a:avLst/>
@@ -6882,8 +6882,8 @@
         </p:nvCxnSpPr>
         <p:spPr>
           <a:xfrm>
-            <a:off x="8087360" y="3535680"/>
-            <a:ext cx="121920" cy="0"/>
+            <a:off x="3291840" y="5933440"/>
+            <a:ext cx="162560" cy="0"/>
           </a:xfrm>
           <a:prstGeom prst="line">
             <a:avLst/>
@@ -6918,8 +6918,8 @@
         </p:nvCxnSpPr>
         <p:spPr>
           <a:xfrm>
-            <a:off x="9347200" y="3535680"/>
-            <a:ext cx="40640" cy="0"/>
+            <a:off x="4754880" y="5933440"/>
+            <a:ext cx="162560" cy="0"/>
           </a:xfrm>
           <a:prstGeom prst="line">
             <a:avLst/>
@@ -6928,6 +6928,7 @@
             <a:solidFill>
               <a:srgbClr val="475569"/>
             </a:solidFill>
+            <a:tailEnd type="triangle" w="med" len="med"/>
           </a:ln>
         </p:spPr>
         <p:style>
@@ -6952,9 +6953,9 @@
           <p:nvPr/>
         </p:nvCxnSpPr>
         <p:spPr>
-          <a:xfrm flipV="1">
-            <a:off x="9387840" y="3515360"/>
-            <a:ext cx="0" cy="20320"/>
+          <a:xfrm>
+            <a:off x="1381760" y="1381760"/>
+            <a:ext cx="162560" cy="0"/>
           </a:xfrm>
           <a:prstGeom prst="line">
             <a:avLst/>
@@ -6963,6 +6964,7 @@
             <a:solidFill>
               <a:srgbClr val="475569"/>
             </a:solidFill>
+            <a:tailEnd type="triangle" w="med" len="med"/>
           </a:ln>
         </p:spPr>
         <p:style>
@@ -6988,8 +6990,8 @@
         </p:nvCxnSpPr>
         <p:spPr>
           <a:xfrm>
-            <a:off x="9387840" y="3515360"/>
-            <a:ext cx="81280" cy="0"/>
+            <a:off x="3007360" y="1381760"/>
+            <a:ext cx="162560" cy="0"/>
           </a:xfrm>
           <a:prstGeom prst="line">
             <a:avLst/>
@@ -7024,8 +7026,8 @@
         </p:nvCxnSpPr>
         <p:spPr>
           <a:xfrm>
-            <a:off x="1259840" y="1239520"/>
-            <a:ext cx="40640" cy="0"/>
+            <a:off x="4470400" y="1381760"/>
+            <a:ext cx="243840" cy="0"/>
           </a:xfrm>
           <a:prstGeom prst="line">
             <a:avLst/>
@@ -7058,9 +7060,9 @@
           <p:nvPr/>
         </p:nvCxnSpPr>
         <p:spPr>
-          <a:xfrm>
-            <a:off x="1300480" y="1239520"/>
-            <a:ext cx="0" cy="20320"/>
+          <a:xfrm flipV="1">
+            <a:off x="4714240" y="1300480"/>
+            <a:ext cx="0" cy="81280"/>
           </a:xfrm>
           <a:prstGeom prst="line">
             <a:avLst/>
@@ -7094,8 +7096,8 @@
         </p:nvCxnSpPr>
         <p:spPr>
           <a:xfrm>
-            <a:off x="1300480" y="1259840"/>
-            <a:ext cx="81280" cy="0"/>
+            <a:off x="4714240" y="1300480"/>
+            <a:ext cx="243840" cy="0"/>
           </a:xfrm>
           <a:prstGeom prst="line">
             <a:avLst/>
@@ -7130,8 +7132,8 @@
         </p:nvCxnSpPr>
         <p:spPr>
           <a:xfrm>
-            <a:off x="2722880" y="1259840"/>
-            <a:ext cx="121920" cy="0"/>
+            <a:off x="5730240" y="1300480"/>
+            <a:ext cx="162560" cy="0"/>
           </a:xfrm>
           <a:prstGeom prst="line">
             <a:avLst/>
@@ -7166,8 +7168,8 @@
         </p:nvCxnSpPr>
         <p:spPr>
           <a:xfrm>
-            <a:off x="3982720" y="1259840"/>
-            <a:ext cx="162560" cy="0"/>
+            <a:off x="7863840" y="1544320"/>
+            <a:ext cx="0" cy="406400"/>
           </a:xfrm>
           <a:prstGeom prst="line">
             <a:avLst/>
@@ -7200,9 +7202,9 @@
           <p:nvPr/>
         </p:nvCxnSpPr>
         <p:spPr>
-          <a:xfrm flipV="1">
-            <a:off x="4145280" y="1198880"/>
-            <a:ext cx="0" cy="60960"/>
+          <a:xfrm flipH="1">
+            <a:off x="1198880" y="1950720"/>
+            <a:ext cx="6664960" cy="0"/>
           </a:xfrm>
           <a:prstGeom prst="line">
             <a:avLst/>
@@ -7236,8 +7238,8 @@
         </p:nvCxnSpPr>
         <p:spPr>
           <a:xfrm>
-            <a:off x="4145280" y="1198880"/>
-            <a:ext cx="203200" cy="0"/>
+            <a:off x="1198880" y="1950720"/>
+            <a:ext cx="0" cy="406400"/>
           </a:xfrm>
           <a:prstGeom prst="line">
             <a:avLst/>
@@ -7272,8 +7274,8 @@
         </p:nvCxnSpPr>
         <p:spPr>
           <a:xfrm>
-            <a:off x="5039360" y="1198880"/>
-            <a:ext cx="121920" cy="0"/>
+            <a:off x="1910080" y="2682240"/>
+            <a:ext cx="162560" cy="0"/>
           </a:xfrm>
           <a:prstGeom prst="line">
             <a:avLst/>
@@ -7308,7 +7310,7 @@
         </p:nvCxnSpPr>
         <p:spPr>
           <a:xfrm>
-            <a:off x="7274560" y="1198880"/>
+            <a:off x="3048000" y="2682240"/>
             <a:ext cx="162560" cy="0"/>
           </a:xfrm>
           <a:prstGeom prst="line">
@@ -7318,6 +7320,7 @@
             <a:solidFill>
               <a:srgbClr val="475569"/>
             </a:solidFill>
+            <a:tailEnd type="triangle" w="med" len="med"/>
           </a:ln>
         </p:spPr>
         <p:style>
@@ -7343,8 +7346,8 @@
         </p:nvCxnSpPr>
         <p:spPr>
           <a:xfrm>
-            <a:off x="7437120" y="1198880"/>
-            <a:ext cx="0" cy="60960"/>
+            <a:off x="6177280" y="2844800"/>
+            <a:ext cx="162560" cy="0"/>
           </a:xfrm>
           <a:prstGeom prst="line">
             <a:avLst/>
@@ -7353,6 +7356,7 @@
             <a:solidFill>
               <a:srgbClr val="475569"/>
             </a:solidFill>
+            <a:tailEnd type="triangle" w="med" len="med"/>
           </a:ln>
         </p:spPr>
         <p:style>
@@ -7378,8 +7382,8 @@
         </p:nvCxnSpPr>
         <p:spPr>
           <a:xfrm>
-            <a:off x="7437120" y="1259840"/>
-            <a:ext cx="203200" cy="0"/>
+            <a:off x="7599680" y="2844800"/>
+            <a:ext cx="162560" cy="0"/>
           </a:xfrm>
           <a:prstGeom prst="line">
             <a:avLst/>
@@ -7414,8 +7418,8 @@
         </p:nvCxnSpPr>
         <p:spPr>
           <a:xfrm>
-            <a:off x="8940800" y="1259840"/>
-            <a:ext cx="121920" cy="0"/>
+            <a:off x="9387840" y="2844800"/>
+            <a:ext cx="162560" cy="0"/>
           </a:xfrm>
           <a:prstGeom prst="line">
             <a:avLst/>
@@ -7450,8 +7454,8 @@
         </p:nvCxnSpPr>
         <p:spPr>
           <a:xfrm>
-            <a:off x="9956800" y="1259840"/>
-            <a:ext cx="121920" cy="0"/>
+            <a:off x="10972800" y="2844800"/>
+            <a:ext cx="81280" cy="0"/>
           </a:xfrm>
           <a:prstGeom prst="line">
             <a:avLst/>
@@ -7460,7 +7464,6 @@
             <a:solidFill>
               <a:srgbClr val="475569"/>
             </a:solidFill>
-            <a:tailEnd type="triangle" w="med" len="med"/>
           </a:ln>
         </p:spPr>
         <p:style>
@@ -7485,9 +7488,9 @@
           <p:nvPr/>
         </p:nvCxnSpPr>
         <p:spPr>
-          <a:xfrm>
-            <a:off x="1463040" y="2377440"/>
-            <a:ext cx="40640" cy="0"/>
+          <a:xfrm flipV="1">
+            <a:off x="11054080" y="2824480"/>
+            <a:ext cx="0" cy="20320"/>
           </a:xfrm>
           <a:prstGeom prst="line">
             <a:avLst/>
@@ -7521,8 +7524,8 @@
         </p:nvCxnSpPr>
         <p:spPr>
           <a:xfrm>
-            <a:off x="1503680" y="2377440"/>
-            <a:ext cx="0" cy="20320"/>
+            <a:off x="11054080" y="2824480"/>
+            <a:ext cx="81280" cy="0"/>
           </a:xfrm>
           <a:prstGeom prst="line">
             <a:avLst/>
@@ -7531,6 +7534,7 @@
             <a:solidFill>
               <a:srgbClr val="475569"/>
             </a:solidFill>
+            <a:tailEnd type="triangle" w="med" len="med"/>
           </a:ln>
         </p:spPr>
         <p:style>
@@ -7556,8 +7560,8 @@
         </p:nvCxnSpPr>
         <p:spPr>
           <a:xfrm>
-            <a:off x="1503680" y="2397760"/>
-            <a:ext cx="81280" cy="0"/>
+            <a:off x="1625600" y="4470400"/>
+            <a:ext cx="162560" cy="0"/>
           </a:xfrm>
           <a:prstGeom prst="line">
             <a:avLst/>
@@ -7592,8 +7596,8 @@
         </p:nvCxnSpPr>
         <p:spPr>
           <a:xfrm>
-            <a:off x="2722880" y="2397760"/>
-            <a:ext cx="121920" cy="0"/>
+            <a:off x="3088640" y="4470400"/>
+            <a:ext cx="162560" cy="0"/>
           </a:xfrm>
           <a:prstGeom prst="line">
             <a:avLst/>
@@ -7628,8 +7632,8 @@
         </p:nvCxnSpPr>
         <p:spPr>
           <a:xfrm>
-            <a:off x="4307840" y="2397760"/>
-            <a:ext cx="40640" cy="0"/>
+            <a:off x="4429760" y="4470400"/>
+            <a:ext cx="81280" cy="0"/>
           </a:xfrm>
           <a:prstGeom prst="line">
             <a:avLst/>
@@ -7663,7 +7667,7 @@
         </p:nvCxnSpPr>
         <p:spPr>
           <a:xfrm flipV="1">
-            <a:off x="4348480" y="2377440"/>
+            <a:off x="4511040" y="4450080"/>
             <a:ext cx="0" cy="20320"/>
           </a:xfrm>
           <a:prstGeom prst="line">
@@ -7698,7 +7702,7 @@
         </p:nvCxnSpPr>
         <p:spPr>
           <a:xfrm>
-            <a:off x="4348480" y="2377440"/>
+            <a:off x="4511040" y="4450080"/>
             <a:ext cx="81280" cy="0"/>
           </a:xfrm>
           <a:prstGeom prst="line">
@@ -7733,9 +7737,9 @@
           <p:nvPr/>
         </p:nvCxnSpPr>
         <p:spPr>
-          <a:xfrm>
-            <a:off x="5689600" y="2377440"/>
-            <a:ext cx="40640" cy="0"/>
+          <a:xfrm flipV="1">
+            <a:off x="5689600" y="2418080"/>
+            <a:ext cx="0" cy="182880"/>
           </a:xfrm>
           <a:prstGeom prst="line">
             <a:avLst/>
@@ -7769,8 +7773,8 @@
         </p:nvCxnSpPr>
         <p:spPr>
           <a:xfrm>
-            <a:off x="5730240" y="2377440"/>
-            <a:ext cx="0" cy="20320"/>
+            <a:off x="5689600" y="2418080"/>
+            <a:ext cx="5628640" cy="0"/>
           </a:xfrm>
           <a:prstGeom prst="line">
             <a:avLst/>
@@ -7804,8 +7808,8 @@
         </p:nvCxnSpPr>
         <p:spPr>
           <a:xfrm>
-            <a:off x="5730240" y="2397760"/>
-            <a:ext cx="81280" cy="0"/>
+            <a:off x="11318240" y="2418080"/>
+            <a:ext cx="0" cy="223520"/>
           </a:xfrm>
           <a:prstGeom prst="line">
             <a:avLst/>
@@ -7839,9 +7843,9 @@
           <p:nvPr/>
         </p:nvCxnSpPr>
         <p:spPr>
-          <a:xfrm>
-            <a:off x="7640320" y="2377440"/>
-            <a:ext cx="40640" cy="0"/>
+          <a:xfrm flipV="1">
+            <a:off x="1137920" y="4043680"/>
+            <a:ext cx="0" cy="182880"/>
           </a:xfrm>
           <a:prstGeom prst="line">
             <a:avLst/>
@@ -7875,8 +7879,8 @@
         </p:nvCxnSpPr>
         <p:spPr>
           <a:xfrm>
-            <a:off x="7680960" y="2377440"/>
-            <a:ext cx="0" cy="20320"/>
+            <a:off x="1137920" y="4043680"/>
+            <a:ext cx="3637280" cy="0"/>
           </a:xfrm>
           <a:prstGeom prst="line">
             <a:avLst/>
@@ -7910,8 +7914,8 @@
         </p:nvCxnSpPr>
         <p:spPr>
           <a:xfrm>
-            <a:off x="7680960" y="2397760"/>
-            <a:ext cx="81280" cy="0"/>
+            <a:off x="4775200" y="4043680"/>
+            <a:ext cx="0" cy="223520"/>
           </a:xfrm>
           <a:prstGeom prst="line">
             <a:avLst/>
@@ -7946,16 +7950,17 @@
         </p:nvCxnSpPr>
         <p:spPr>
           <a:xfrm>
-            <a:off x="8900160" y="2397760"/>
-            <a:ext cx="40640" cy="0"/>
+            <a:off x="3881120" y="3007360"/>
+            <a:ext cx="0" cy="264160"/>
           </a:xfrm>
           <a:prstGeom prst="line">
             <a:avLst/>
           </a:prstGeom>
           <a:ln w="25400">
             <a:solidFill>
-              <a:srgbClr val="475569"/>
+              <a:srgbClr val="B45309"/>
             </a:solidFill>
+            <a:prstDash val="dash"/>
           </a:ln>
         </p:spPr>
         <p:style>
@@ -7980,17 +7985,18 @@
           <p:nvPr/>
         </p:nvCxnSpPr>
         <p:spPr>
-          <a:xfrm flipV="1">
-            <a:off x="8940800" y="2377440"/>
-            <a:ext cx="0" cy="20320"/>
+          <a:xfrm>
+            <a:off x="3881120" y="3271520"/>
+            <a:ext cx="4693920" cy="0"/>
           </a:xfrm>
           <a:prstGeom prst="line">
             <a:avLst/>
           </a:prstGeom>
           <a:ln w="25400">
             <a:solidFill>
-              <a:srgbClr val="475569"/>
+              <a:srgbClr val="B45309"/>
             </a:solidFill>
+            <a:prstDash val="dash"/>
           </a:ln>
         </p:spPr>
         <p:style>
@@ -8015,434 +8021,8 @@
           <p:nvPr/>
         </p:nvCxnSpPr>
         <p:spPr>
-          <a:xfrm>
-            <a:off x="8940800" y="2377440"/>
-            <a:ext cx="81280" cy="0"/>
-          </a:xfrm>
-          <a:prstGeom prst="line">
-            <a:avLst/>
-          </a:prstGeom>
-          <a:ln w="25400">
-            <a:solidFill>
-              <a:srgbClr val="475569"/>
-            </a:solidFill>
-            <a:tailEnd type="triangle" w="med" len="med"/>
-          </a:ln>
-        </p:spPr>
-        <p:style>
-          <a:lnRef idx="2">
-            <a:schemeClr val="accent1"/>
-          </a:lnRef>
-          <a:fillRef idx="0">
-            <a:schemeClr val="accent1"/>
-          </a:fillRef>
-          <a:effectRef idx="1">
-            <a:schemeClr val="accent1"/>
-          </a:effectRef>
-          <a:fontRef idx="minor">
-            <a:schemeClr val="tx1"/>
-          </a:fontRef>
-        </p:style>
-      </p:cxnSp>
-      <p:cxnSp>
-        <p:nvCxnSpPr>
-          <p:cNvPr id="76" name="Connector 75"/>
-          <p:cNvCxnSpPr/>
-          <p:nvPr/>
-        </p:nvCxnSpPr>
-        <p:spPr>
-          <a:xfrm>
-            <a:off x="10078720" y="2377440"/>
-            <a:ext cx="40640" cy="0"/>
-          </a:xfrm>
-          <a:prstGeom prst="line">
-            <a:avLst/>
-          </a:prstGeom>
-          <a:ln w="25400">
-            <a:solidFill>
-              <a:srgbClr val="475569"/>
-            </a:solidFill>
-          </a:ln>
-        </p:spPr>
-        <p:style>
-          <a:lnRef idx="2">
-            <a:schemeClr val="accent1"/>
-          </a:lnRef>
-          <a:fillRef idx="0">
-            <a:schemeClr val="accent1"/>
-          </a:fillRef>
-          <a:effectRef idx="1">
-            <a:schemeClr val="accent1"/>
-          </a:effectRef>
-          <a:fontRef idx="minor">
-            <a:schemeClr val="tx1"/>
-          </a:fontRef>
-        </p:style>
-      </p:cxnSp>
-      <p:cxnSp>
-        <p:nvCxnSpPr>
-          <p:cNvPr id="77" name="Connector 76"/>
-          <p:cNvCxnSpPr/>
-          <p:nvPr/>
-        </p:nvCxnSpPr>
-        <p:spPr>
-          <a:xfrm>
-            <a:off x="10119360" y="2377440"/>
-            <a:ext cx="0" cy="20320"/>
-          </a:xfrm>
-          <a:prstGeom prst="line">
-            <a:avLst/>
-          </a:prstGeom>
-          <a:ln w="25400">
-            <a:solidFill>
-              <a:srgbClr val="475569"/>
-            </a:solidFill>
-          </a:ln>
-        </p:spPr>
-        <p:style>
-          <a:lnRef idx="2">
-            <a:schemeClr val="accent1"/>
-          </a:lnRef>
-          <a:fillRef idx="0">
-            <a:schemeClr val="accent1"/>
-          </a:fillRef>
-          <a:effectRef idx="1">
-            <a:schemeClr val="accent1"/>
-          </a:effectRef>
-          <a:fontRef idx="minor">
-            <a:schemeClr val="tx1"/>
-          </a:fontRef>
-        </p:style>
-      </p:cxnSp>
-      <p:cxnSp>
-        <p:nvCxnSpPr>
-          <p:cNvPr id="78" name="Connector 77"/>
-          <p:cNvCxnSpPr/>
-          <p:nvPr/>
-        </p:nvCxnSpPr>
-        <p:spPr>
-          <a:xfrm>
-            <a:off x="10119360" y="2397760"/>
-            <a:ext cx="81280" cy="0"/>
-          </a:xfrm>
-          <a:prstGeom prst="line">
-            <a:avLst/>
-          </a:prstGeom>
-          <a:ln w="25400">
-            <a:solidFill>
-              <a:srgbClr val="475569"/>
-            </a:solidFill>
-            <a:tailEnd type="triangle" w="med" len="med"/>
-          </a:ln>
-        </p:spPr>
-        <p:style>
-          <a:lnRef idx="2">
-            <a:schemeClr val="accent1"/>
-          </a:lnRef>
-          <a:fillRef idx="0">
-            <a:schemeClr val="accent1"/>
-          </a:fillRef>
-          <a:effectRef idx="1">
-            <a:schemeClr val="accent1"/>
-          </a:effectRef>
-          <a:fontRef idx="minor">
-            <a:schemeClr val="tx1"/>
-          </a:fontRef>
-        </p:style>
-      </p:cxnSp>
-      <p:cxnSp>
-        <p:nvCxnSpPr>
-          <p:cNvPr id="79" name="Connector 78"/>
-          <p:cNvCxnSpPr/>
-          <p:nvPr/>
-        </p:nvCxnSpPr>
-        <p:spPr>
           <a:xfrm flipV="1">
-            <a:off x="1016000" y="2092960"/>
-            <a:ext cx="0" cy="101600"/>
-          </a:xfrm>
-          <a:prstGeom prst="line">
-            <a:avLst/>
-          </a:prstGeom>
-          <a:ln w="25400">
-            <a:solidFill>
-              <a:srgbClr val="475569"/>
-            </a:solidFill>
-          </a:ln>
-        </p:spPr>
-        <p:style>
-          <a:lnRef idx="2">
-            <a:schemeClr val="accent1"/>
-          </a:lnRef>
-          <a:fillRef idx="0">
-            <a:schemeClr val="accent1"/>
-          </a:fillRef>
-          <a:effectRef idx="1">
-            <a:schemeClr val="accent1"/>
-          </a:effectRef>
-          <a:fontRef idx="minor">
-            <a:schemeClr val="tx1"/>
-          </a:fontRef>
-        </p:style>
-      </p:cxnSp>
-      <p:cxnSp>
-        <p:nvCxnSpPr>
-          <p:cNvPr id="80" name="Connector 79"/>
-          <p:cNvCxnSpPr/>
-          <p:nvPr/>
-        </p:nvCxnSpPr>
-        <p:spPr>
-          <a:xfrm>
-            <a:off x="1016000" y="2092960"/>
-            <a:ext cx="4958080" cy="0"/>
-          </a:xfrm>
-          <a:prstGeom prst="line">
-            <a:avLst/>
-          </a:prstGeom>
-          <a:ln w="25400">
-            <a:solidFill>
-              <a:srgbClr val="475569"/>
-            </a:solidFill>
-          </a:ln>
-        </p:spPr>
-        <p:style>
-          <a:lnRef idx="2">
-            <a:schemeClr val="accent1"/>
-          </a:lnRef>
-          <a:fillRef idx="0">
-            <a:schemeClr val="accent1"/>
-          </a:fillRef>
-          <a:effectRef idx="1">
-            <a:schemeClr val="accent1"/>
-          </a:effectRef>
-          <a:fontRef idx="minor">
-            <a:schemeClr val="tx1"/>
-          </a:fontRef>
-        </p:style>
-      </p:cxnSp>
-      <p:cxnSp>
-        <p:nvCxnSpPr>
-          <p:cNvPr id="81" name="Connector 80"/>
-          <p:cNvCxnSpPr/>
-          <p:nvPr/>
-        </p:nvCxnSpPr>
-        <p:spPr>
-          <a:xfrm>
-            <a:off x="5974080" y="2092960"/>
-            <a:ext cx="0" cy="142240"/>
-          </a:xfrm>
-          <a:prstGeom prst="line">
-            <a:avLst/>
-          </a:prstGeom>
-          <a:ln w="25400">
-            <a:solidFill>
-              <a:srgbClr val="475569"/>
-            </a:solidFill>
-            <a:tailEnd type="triangle" w="med" len="med"/>
-          </a:ln>
-        </p:spPr>
-        <p:style>
-          <a:lnRef idx="2">
-            <a:schemeClr val="accent1"/>
-          </a:lnRef>
-          <a:fillRef idx="0">
-            <a:schemeClr val="accent1"/>
-          </a:fillRef>
-          <a:effectRef idx="1">
-            <a:schemeClr val="accent1"/>
-          </a:effectRef>
-          <a:fontRef idx="minor">
-            <a:schemeClr val="tx1"/>
-          </a:fontRef>
-        </p:style>
-      </p:cxnSp>
-      <p:cxnSp>
-        <p:nvCxnSpPr>
-          <p:cNvPr id="82" name="Connector 81"/>
-          <p:cNvCxnSpPr/>
-          <p:nvPr/>
-        </p:nvCxnSpPr>
-        <p:spPr>
-          <a:xfrm flipV="1">
-            <a:off x="7193280" y="2092960"/>
-            <a:ext cx="0" cy="101600"/>
-          </a:xfrm>
-          <a:prstGeom prst="line">
-            <a:avLst/>
-          </a:prstGeom>
-          <a:ln w="25400">
-            <a:solidFill>
-              <a:srgbClr val="475569"/>
-            </a:solidFill>
-          </a:ln>
-        </p:spPr>
-        <p:style>
-          <a:lnRef idx="2">
-            <a:schemeClr val="accent1"/>
-          </a:lnRef>
-          <a:fillRef idx="0">
-            <a:schemeClr val="accent1"/>
-          </a:fillRef>
-          <a:effectRef idx="1">
-            <a:schemeClr val="accent1"/>
-          </a:effectRef>
-          <a:fontRef idx="minor">
-            <a:schemeClr val="tx1"/>
-          </a:fontRef>
-        </p:style>
-      </p:cxnSp>
-      <p:cxnSp>
-        <p:nvCxnSpPr>
-          <p:cNvPr id="83" name="Connector 82"/>
-          <p:cNvCxnSpPr/>
-          <p:nvPr/>
-        </p:nvCxnSpPr>
-        <p:spPr>
-          <a:xfrm>
-            <a:off x="7193280" y="2092960"/>
-            <a:ext cx="3169920" cy="0"/>
-          </a:xfrm>
-          <a:prstGeom prst="line">
-            <a:avLst/>
-          </a:prstGeom>
-          <a:ln w="25400">
-            <a:solidFill>
-              <a:srgbClr val="475569"/>
-            </a:solidFill>
-          </a:ln>
-        </p:spPr>
-        <p:style>
-          <a:lnRef idx="2">
-            <a:schemeClr val="accent1"/>
-          </a:lnRef>
-          <a:fillRef idx="0">
-            <a:schemeClr val="accent1"/>
-          </a:fillRef>
-          <a:effectRef idx="1">
-            <a:schemeClr val="accent1"/>
-          </a:effectRef>
-          <a:fontRef idx="minor">
-            <a:schemeClr val="tx1"/>
-          </a:fontRef>
-        </p:style>
-      </p:cxnSp>
-      <p:cxnSp>
-        <p:nvCxnSpPr>
-          <p:cNvPr id="84" name="Connector 83"/>
-          <p:cNvCxnSpPr/>
-          <p:nvPr/>
-        </p:nvCxnSpPr>
-        <p:spPr>
-          <a:xfrm>
-            <a:off x="10363200" y="2092960"/>
-            <a:ext cx="0" cy="142240"/>
-          </a:xfrm>
-          <a:prstGeom prst="line">
-            <a:avLst/>
-          </a:prstGeom>
-          <a:ln w="25400">
-            <a:solidFill>
-              <a:srgbClr val="475569"/>
-            </a:solidFill>
-            <a:tailEnd type="triangle" w="med" len="med"/>
-          </a:ln>
-        </p:spPr>
-        <p:style>
-          <a:lnRef idx="2">
-            <a:schemeClr val="accent1"/>
-          </a:lnRef>
-          <a:fillRef idx="0">
-            <a:schemeClr val="accent1"/>
-          </a:fillRef>
-          <a:effectRef idx="1">
-            <a:schemeClr val="accent1"/>
-          </a:effectRef>
-          <a:fontRef idx="minor">
-            <a:schemeClr val="tx1"/>
-          </a:fontRef>
-        </p:style>
-      </p:cxnSp>
-      <p:cxnSp>
-        <p:nvCxnSpPr>
-          <p:cNvPr id="85" name="Connector 84"/>
-          <p:cNvCxnSpPr/>
-          <p:nvPr/>
-        </p:nvCxnSpPr>
-        <p:spPr>
-          <a:xfrm>
-            <a:off x="10668000" y="1503680"/>
-            <a:ext cx="0" cy="1239520"/>
-          </a:xfrm>
-          <a:prstGeom prst="line">
-            <a:avLst/>
-          </a:prstGeom>
-          <a:ln w="25400">
-            <a:solidFill>
-              <a:srgbClr val="B45309"/>
-            </a:solidFill>
-            <a:prstDash val="dash"/>
-          </a:ln>
-        </p:spPr>
-        <p:style>
-          <a:lnRef idx="2">
-            <a:schemeClr val="accent1"/>
-          </a:lnRef>
-          <a:fillRef idx="0">
-            <a:schemeClr val="accent1"/>
-          </a:fillRef>
-          <a:effectRef idx="1">
-            <a:schemeClr val="accent1"/>
-          </a:effectRef>
-          <a:fontRef idx="minor">
-            <a:schemeClr val="tx1"/>
-          </a:fontRef>
-        </p:style>
-      </p:cxnSp>
-      <p:cxnSp>
-        <p:nvCxnSpPr>
-          <p:cNvPr id="86" name="Connector 85"/>
-          <p:cNvCxnSpPr/>
-          <p:nvPr/>
-        </p:nvCxnSpPr>
-        <p:spPr>
-          <a:xfrm flipH="1">
-            <a:off x="3576320" y="2743200"/>
-            <a:ext cx="7091680" cy="0"/>
-          </a:xfrm>
-          <a:prstGeom prst="line">
-            <a:avLst/>
-          </a:prstGeom>
-          <a:ln w="25400">
-            <a:solidFill>
-              <a:srgbClr val="B45309"/>
-            </a:solidFill>
-            <a:prstDash val="dash"/>
-          </a:ln>
-        </p:spPr>
-        <p:style>
-          <a:lnRef idx="2">
-            <a:schemeClr val="accent1"/>
-          </a:lnRef>
-          <a:fillRef idx="0">
-            <a:schemeClr val="accent1"/>
-          </a:fillRef>
-          <a:effectRef idx="1">
-            <a:schemeClr val="accent1"/>
-          </a:effectRef>
-          <a:fontRef idx="minor">
-            <a:schemeClr val="tx1"/>
-          </a:fontRef>
-        </p:style>
-      </p:cxnSp>
-      <p:cxnSp>
-        <p:nvCxnSpPr>
-          <p:cNvPr id="87" name="Connector 86"/>
-          <p:cNvCxnSpPr/>
-          <p:nvPr/>
-        </p:nvCxnSpPr>
-        <p:spPr>
-          <a:xfrm flipV="1">
-            <a:off x="3576320" y="2641600"/>
+            <a:off x="8575040" y="3169920"/>
             <a:ext cx="0" cy="101600"/>
           </a:xfrm>
           <a:prstGeom prst="line">
@@ -8473,7 +8053,7 @@
       </p:cxnSp>
       <p:sp>
         <p:nvSpPr>
-          <p:cNvPr id="88" name="TextBox 87"/>
+          <p:cNvPr id="76" name="TextBox 75"/>
           <p:cNvSpPr txBox="1"/>
           <p:nvPr/>
         </p:nvSpPr>
@@ -8508,7 +8088,7 @@
       </p:sp>
       <p:sp>
         <p:nvSpPr>
-          <p:cNvPr id="89" name="TextBox 88"/>
+          <p:cNvPr id="77" name="TextBox 76"/>
           <p:cNvSpPr txBox="1"/>
           <p:nvPr/>
         </p:nvSpPr>
@@ -8543,7 +8123,7 @@
       </p:sp>
       <p:sp>
         <p:nvSpPr>
-          <p:cNvPr id="90" name="TextBox 89"/>
+          <p:cNvPr id="78" name="TextBox 77"/>
           <p:cNvSpPr txBox="1"/>
           <p:nvPr/>
         </p:nvSpPr>
